--- a/docs/ODMI_Progress_5min.pptx
+++ b/docs/ODMI_Progress_5min.pptx
@@ -110,244 +110,6 @@
     </a:lvl9pPr>
   </p:defaultTextStyle>
 </p:presentation>
-</file>
-
-<file path=ppt/charts/chart1.xml><?xml version="1.0" encoding="utf-8"?>
-<c:chartSpace xmlns:c="http://schemas.openxmlformats.org/drawingml/2006/chart" xmlns:a="http://schemas.openxmlformats.org/drawingml/2006/main" xmlns:r="http://schemas.openxmlformats.org/officeDocument/2006/relationships">
-  <c:date1904 val="0"/>
-  <c:roundedCorners val="1"/>
-  <c:chart>
-    <c:autoTitleDeleted val="1"/>
-    <c:plotArea>
-      <c:layout/>
-      <c:barChart>
-        <c:barDir val="col"/>
-        <c:grouping val="clustered"/>
-        <c:varyColors val="0"/>
-        <c:ser>
-          <c:idx val="0"/>
-          <c:order val="0"/>
-          <c:tx>
-            <c:strRef>
-              <c:f>Sheet1!$B$1</c:f>
-              <c:strCache>
-                <c:ptCount val="1"/>
-                <c:pt idx="0">
-                  <c:v>agreement</c:v>
-                </c:pt>
-              </c:strCache>
-            </c:strRef>
-          </c:tx>
-          <c:spPr>
-            <a:solidFill>
-              <a:srgbClr val="0E7C86"/>
-            </a:solidFill>
-            <a:effectLst/>
-          </c:spPr>
-          <c:invertIfNegative val="0"/>
-          <c:dLbls>
-            <c:numFmt formatCode="0&quot;%&quot;" sourceLinked="0"/>
-            <c:txPr>
-              <a:bodyPr/>
-              <a:lstStyle/>
-              <a:p>
-                <a:pPr>
-                  <a:defRPr b="1" i="0" strike="noStrike" sz="1200" u="none">
-                    <a:solidFill>
-                      <a:srgbClr val="1E293B"/>
-                    </a:solidFill>
-                    <a:latin typeface="Arial"/>
-                  </a:defRPr>
-                </a:pPr>
-              </a:p>
-            </c:txPr>
-            <c:showLegendKey val="0"/>
-            <c:showVal val="1"/>
-            <c:showCatName val="0"/>
-            <c:showSerName val="0"/>
-            <c:showPercent val="0"/>
-            <c:showBubbleSize val="0"/>
-            <c:showLeaderLines val="0"/>
-          </c:dLbls>
-          <c:cat>
-            <c:multiLvlStrRef>
-              <c:f>Sheet1!$A$2:$A$3</c:f>
-              <c:multiLvlStrCache>
-                <c:ptCount val="2"/>
-                <c:lvl>
-                  <c:pt idx="0">
-                    <c:v>France (n=94)</c:v>
-                  </c:pt>
-                  <c:pt idx="1">
-                    <c:v>Malta (n=48)</c:v>
-                  </c:pt>
-                </c:lvl>
-              </c:multiLvlStrCache>
-            </c:multiLvlStrRef>
-          </c:cat>
-          <c:val>
-            <c:numRef>
-              <c:f>Sheet1!$B$2:$B$3</c:f>
-              <c:numCache>
-                <c:formatCode>General</c:formatCode>
-                <c:ptCount val="2"/>
-                <c:pt idx="0">
-                  <c:v>94</c:v>
-                </c:pt>
-                <c:pt idx="1">
-                  <c:v>75</c:v>
-                </c:pt>
-              </c:numCache>
-            </c:numRef>
-          </c:val>
-        </c:ser>
-        <c:dLbls>
-          <c:numFmt formatCode="0&quot;%&quot;" sourceLinked="0"/>
-          <c:txPr>
-            <a:bodyPr/>
-            <a:lstStyle/>
-            <a:p>
-              <a:pPr>
-                <a:defRPr b="1" i="0" strike="noStrike" sz="1200" u="none">
-                  <a:solidFill>
-                    <a:srgbClr val="1E293B"/>
-                  </a:solidFill>
-                  <a:latin typeface="Arial"/>
-                </a:defRPr>
-              </a:pPr>
-            </a:p>
-          </c:txPr>
-          <c:showLegendKey val="0"/>
-          <c:showVal val="1"/>
-          <c:showCatName val="0"/>
-          <c:showSerName val="0"/>
-          <c:showPercent val="0"/>
-          <c:showBubbleSize val="0"/>
-          <c:showLeaderLines val="0"/>
-        </c:dLbls>
-        <c:gapWidth val="150"/>
-        <c:overlap val="0"/>
-        <c:axId val="2094734554"/>
-        <c:axId val="2094734552"/>
-        <c:axId val="2094734556"/>
-      </c:barChart>
-      <c:catAx>
-        <c:axId val="2094734554"/>
-        <c:scaling>
-          <c:orientation val="minMax"/>
-        </c:scaling>
-        <c:delete val="0"/>
-        <c:axPos val="b"/>
-        <c:numFmt formatCode="General" sourceLinked="1"/>
-        <c:majorTickMark val="out"/>
-        <c:minorTickMark val="none"/>
-        <c:tickLblPos val="low"/>
-        <c:spPr>
-          <a:ln w="12700" cap="flat">
-            <a:solidFill>
-              <a:srgbClr val="888888"/>
-            </a:solidFill>
-            <a:prstDash val="solid"/>
-            <a:round/>
-          </a:ln>
-        </c:spPr>
-        <c:txPr>
-          <a:bodyPr/>
-          <a:lstStyle/>
-          <a:p>
-            <a:pPr>
-              <a:defRPr sz="1200" b="0" i="0" u="none" strike="noStrike">
-                <a:solidFill>
-                  <a:srgbClr val="64748B"/>
-                </a:solidFill>
-                <a:latin typeface="Arial"/>
-              </a:defRPr>
-            </a:pPr>
-            <a:endParaRPr lang="en-US"/>
-          </a:p>
-        </c:txPr>
-        <c:crossAx val="2094734552"/>
-        <c:crosses val="autoZero"/>
-        <c:auto val="1"/>
-        <c:lblAlgn val="ctr"/>
-        <c:noMultiLvlLbl val="1"/>
-      </c:catAx>
-      <c:valAx>
-        <c:axId val="2094734552"/>
-        <c:scaling>
-          <c:orientation val="minMax"/>
-          <c:max val="100"/>
-          <c:min val="0"/>
-        </c:scaling>
-        <c:delete val="0"/>
-        <c:axPos val="l"/>
-        <c:majorGridlines>
-          <c:spPr>
-            <a:ln w="6350" cap="flat">
-              <a:solidFill>
-                <a:srgbClr val="E2E8F0"/>
-              </a:solidFill>
-              <a:prstDash val="solid"/>
-              <a:round/>
-            </a:ln>
-          </c:spPr>
-        </c:majorGridlines>
-        <c:numFmt formatCode="General" sourceLinked="0"/>
-        <c:majorTickMark val="out"/>
-        <c:minorTickMark val="none"/>
-        <c:tickLblPos val="nextTo"/>
-        <c:spPr>
-          <a:ln w="12700" cap="flat">
-            <a:solidFill>
-              <a:srgbClr val="888888"/>
-            </a:solidFill>
-            <a:prstDash val="solid"/>
-            <a:round/>
-          </a:ln>
-        </c:spPr>
-        <c:txPr>
-          <a:bodyPr/>
-          <a:lstStyle/>
-          <a:p>
-            <a:pPr>
-              <a:defRPr sz="1200" b="0" i="0" u="none" strike="noStrike">
-                <a:solidFill>
-                  <a:srgbClr val="64748B"/>
-                </a:solidFill>
-                <a:latin typeface="Arial"/>
-              </a:defRPr>
-            </a:pPr>
-            <a:endParaRPr lang="en-US"/>
-          </a:p>
-        </c:txPr>
-        <c:crossAx val="2094734554"/>
-        <c:crosses val="autoZero"/>
-        <c:crossBetween val="between"/>
-      </c:valAx>
-      <c:spPr>
-        <a:noFill/>
-        <a:ln>
-          <a:noFill/>
-        </a:ln>
-        <a:effectLst/>
-      </c:spPr>
-    </c:plotArea>
-    <c:plotVisOnly val="1"/>
-    <c:dispBlanksAs val="span"/>
-  </c:chart>
-  <c:spPr>
-    <a:solidFill>
-      <a:srgbClr val="FFFFFF"/>
-    </a:solidFill>
-    <a:ln>
-      <a:noFill/>
-    </a:ln>
-    <a:effectLst/>
-  </c:spPr>
-  <c:externalData r:id="rId1">
-    <c:autoUpdate val="0"/>
-  </c:externalData>
-</c:chartSpace>
 </file>
 
 <file path=ppt/notesMasters/notesMaster1.xml><?xml version="1.0" encoding="utf-8"?>
@@ -1567,7 +1329,7 @@
         <p:spPr>
           <a:xfrm>
             <a:off x="685800" y="777240"/>
-            <a:ext cx="10972800" cy="365760"/>
+            <a:ext cx="8229600" cy="292608"/>
           </a:xfrm>
           <a:prstGeom prst="rect">
             <a:avLst/>
@@ -1583,7 +1345,7 @@
               <a:buNone/>
             </a:pPr>
             <a:r>
-              <a:rPr lang="en-US" sz="1300" b="1" spc="200" kern="0" dirty="0">
+              <a:rPr lang="en-US" sz="1250" b="1" spc="200" kern="0" dirty="0">
                 <a:solidFill>
                   <a:srgbClr val="5EC8C8"/>
                 </a:solidFill>
@@ -1593,7 +1355,7 @@
               </a:rPr>
               <a:t>MSC ADVANCED COMPUTING   ·   KING'S COLLEGE LONDON   ·   2026</a:t>
             </a:r>
-            <a:endParaRPr lang="en-US" sz="1300" dirty="0"/>
+            <a:endParaRPr lang="en-US" sz="1250" dirty="0"/>
           </a:p>
         </p:txBody>
       </p:sp>
@@ -1605,7 +1367,7 @@
         </p:nvSpPr>
         <p:spPr>
           <a:xfrm>
-            <a:off x="685800" y="1417320"/>
+            <a:off x="685800" y="1371600"/>
             <a:ext cx="10058400" cy="2103120"/>
           </a:xfrm>
           <a:prstGeom prst="rect">
@@ -1620,12 +1382,12 @@
           <a:p>
             <a:pPr indent="0" marL="0">
               <a:lnSpc>
-                <a:spcPct val="105000"/>
+                <a:spcPct val="104000"/>
               </a:lnSpc>
               <a:buNone/>
             </a:pPr>
             <a:r>
-              <a:rPr lang="en-US" sz="4000" b="1" dirty="0">
+              <a:rPr lang="en-US" sz="4400" b="1" dirty="0">
                 <a:solidFill>
                   <a:srgbClr val="FFFFFF"/>
                 </a:solidFill>
@@ -1633,19 +1395,19 @@
                 <a:ea typeface="Georgia" pitchFamily="34" charset="-122"/>
                 <a:cs typeface="Georgia" pitchFamily="34" charset="-120"/>
               </a:rPr>
-              <a:t>Automating the EU Open Data</a:t>
-            </a:r>
-            <a:endParaRPr lang="en-US" sz="4000" dirty="0"/>
+              <a:t>AI researchers that</a:t>
+            </a:r>
+            <a:endParaRPr lang="en-US" sz="4400" dirty="0"/>
           </a:p>
           <a:p>
             <a:pPr indent="0" marL="0">
               <a:lnSpc>
-                <a:spcPct val="105000"/>
+                <a:spcPct val="104000"/>
               </a:lnSpc>
               <a:buNone/>
             </a:pPr>
             <a:r>
-              <a:rPr lang="en-US" sz="4000" b="1" dirty="0">
+              <a:rPr lang="en-US" sz="4400" b="1" dirty="0">
                 <a:solidFill>
                   <a:srgbClr val="FFFFFF"/>
                 </a:solidFill>
@@ -1653,9 +1415,9 @@
                 <a:ea typeface="Georgia" pitchFamily="34" charset="-122"/>
                 <a:cs typeface="Georgia" pitchFamily="34" charset="-120"/>
               </a:rPr>
-              <a:t>Maturity Index with an LLM agent swarm</a:t>
-            </a:r>
-            <a:endParaRPr lang="en-US" sz="4000" dirty="0"/>
+              <a:t>do not make things up</a:t>
+            </a:r>
+            <a:endParaRPr lang="en-US" sz="4400" dirty="0"/>
           </a:p>
         </p:txBody>
       </p:sp>
@@ -1667,8 +1429,8 @@
         </p:nvSpPr>
         <p:spPr>
           <a:xfrm>
-            <a:off x="685800" y="3886200"/>
-            <a:ext cx="9692640" cy="1005840"/>
+            <a:off x="685800" y="3977640"/>
+            <a:ext cx="9875520" cy="1005840"/>
           </a:xfrm>
           <a:prstGeom prst="rect">
             <a:avLst/>
@@ -1682,7 +1444,7 @@
           <a:p>
             <a:pPr indent="0" marL="0">
               <a:lnSpc>
-                <a:spcPct val="110000"/>
+                <a:spcPct val="112000"/>
               </a:lnSpc>
               <a:buNone/>
             </a:pPr>
@@ -1695,7 +1457,7 @@
                 <a:ea typeface="Calibri" pitchFamily="34" charset="-122"/>
                 <a:cs typeface="Calibri" pitchFamily="34" charset="-120"/>
               </a:rPr>
-              <a:t>An agent swarm that answers ODMI questions across 36 countries, with every answer traced to a source, and able to challenge each country's self-report.</a:t>
+              <a:t>Building and stress-testing an agent swarm that answers only what a source supports. The EU Open Data Maturity Index is the testbed.</a:t>
             </a:r>
             <a:endParaRPr lang="en-US" sz="1800" dirty="0"/>
           </a:p>
@@ -2540,8 +2302,8 @@
         </p:nvSpPr>
         <p:spPr>
           <a:xfrm>
-            <a:off x="9875520" y="6080760"/>
-            <a:ext cx="2103120" cy="274320"/>
+            <a:off x="7863840" y="6080760"/>
+            <a:ext cx="4297680" cy="274320"/>
           </a:xfrm>
           <a:prstGeom prst="rect">
             <a:avLst/>
@@ -2565,7 +2327,7 @@
                 <a:ea typeface="Calibri" pitchFamily="34" charset="-122"/>
                 <a:cs typeface="Calibri" pitchFamily="34" charset="-120"/>
               </a:rPr>
-              <a:t>36 countries</a:t>
+              <a:t>36 countries  ·  5,148 question-country pairs</a:t>
             </a:r>
             <a:endParaRPr lang="en-US" sz="1100" dirty="0"/>
           </a:p>
@@ -2612,7 +2374,7 @@
         <p:spPr>
           <a:xfrm>
             <a:off x="640080" y="411480"/>
-            <a:ext cx="10972800" cy="640080"/>
+            <a:ext cx="11155680" cy="640080"/>
           </a:xfrm>
           <a:prstGeom prst="rect">
             <a:avLst/>
@@ -2636,7 +2398,7 @@
                 <a:ea typeface="Georgia" pitchFamily="34" charset="-122"/>
                 <a:cs typeface="Georgia" pitchFamily="34" charset="-120"/>
               </a:rPr>
-              <a:t>The problem, and the aim</a:t>
+              <a:t>A confident answer is not a correct one</a:t>
             </a:r>
             <a:endParaRPr lang="en-US" sz="3200" dirty="0"/>
           </a:p>
@@ -2644,43 +2406,14 @@
       </p:sp>
       <p:sp>
         <p:nvSpPr>
-          <p:cNvPr id="3" name="Shape 1"/>
-          <p:cNvSpPr/>
-          <p:nvPr/>
-        </p:nvSpPr>
-        <p:spPr>
-          <a:xfrm>
-            <a:off x="640080" y="1325880"/>
-            <a:ext cx="3383280" cy="2880360"/>
-          </a:xfrm>
-          <a:prstGeom prst="roundRect">
-            <a:avLst>
-              <a:gd name="adj" fmla="val 2222"/>
-            </a:avLst>
-          </a:prstGeom>
-          <a:solidFill>
-            <a:srgbClr val="0E7C86"/>
-          </a:solidFill>
-          <a:ln/>
-          <a:effectLst>
-            <a:outerShdw sx="100000" sy="100000" kx="0" ky="0" algn="bl" rotWithShape="0" blurRad="88900" dist="25400" dir="8100000">
-              <a:srgbClr val="0F2A43">
-                <a:alpha val="12000"/>
-              </a:srgbClr>
-            </a:outerShdw>
-          </a:effectLst>
-        </p:spPr>
-      </p:sp>
-      <p:sp>
-        <p:nvSpPr>
-          <p:cNvPr id="4" name="Text 2"/>
-          <p:cNvSpPr/>
-          <p:nvPr/>
-        </p:nvSpPr>
-        <p:spPr>
-          <a:xfrm>
-            <a:off x="640080" y="1554480"/>
-            <a:ext cx="3383280" cy="1097280"/>
+          <p:cNvPr id="3" name="Text 1"/>
+          <p:cNvSpPr/>
+          <p:nvPr/>
+        </p:nvSpPr>
+        <p:spPr>
+          <a:xfrm>
+            <a:off x="640080" y="1188720"/>
+            <a:ext cx="10972800" cy="914400"/>
           </a:xfrm>
           <a:prstGeom prst="rect">
             <a:avLst/>
@@ -2692,288 +2425,80 @@
           <a:bodyPr wrap="square" rtlCol="0" anchor="ctr"/>
           <a:lstStyle/>
           <a:p>
-            <a:pPr algn="ctr" indent="0" marL="0">
-              <a:buNone/>
-            </a:pPr>
-            <a:r>
-              <a:rPr lang="en-US" sz="5400" b="1" dirty="0">
-                <a:solidFill>
-                  <a:srgbClr val="FFFFFF"/>
-                </a:solidFill>
-                <a:latin typeface="Georgia" pitchFamily="34" charset="0"/>
-                <a:ea typeface="Georgia" pitchFamily="34" charset="-122"/>
-                <a:cs typeface="Georgia" pitchFamily="34" charset="-120"/>
-              </a:rPr>
-              <a:t>5,148</a:t>
-            </a:r>
-            <a:endParaRPr lang="en-US" sz="5400" dirty="0"/>
-          </a:p>
-        </p:txBody>
-      </p:sp>
-      <p:sp>
-        <p:nvSpPr>
-          <p:cNvPr id="5" name="Text 3"/>
-          <p:cNvSpPr/>
-          <p:nvPr/>
-        </p:nvSpPr>
-        <p:spPr>
-          <a:xfrm>
-            <a:off x="777240" y="2697480"/>
-            <a:ext cx="3108960" cy="640080"/>
-          </a:xfrm>
-          <a:prstGeom prst="rect">
-            <a:avLst/>
-          </a:prstGeom>
-          <a:noFill/>
-          <a:ln/>
-        </p:spPr>
-        <p:txBody>
-          <a:bodyPr wrap="square" rtlCol="0" anchor="ctr"/>
-          <a:lstStyle/>
-          <a:p>
-            <a:pPr algn="ctr" indent="0" marL="0">
+            <a:pPr indent="0" marL="0">
               <a:lnSpc>
-                <a:spcPct val="105000"/>
+                <a:spcPct val="115000"/>
               </a:lnSpc>
               <a:buNone/>
             </a:pPr>
             <a:r>
-              <a:rPr lang="en-US" sz="1400" dirty="0">
-                <a:solidFill>
-                  <a:srgbClr val="FFFFFF"/>
+              <a:rPr lang="en-US" sz="1600" dirty="0">
+                <a:solidFill>
+                  <a:srgbClr val="1E293B"/>
                 </a:solidFill>
                 <a:latin typeface="Calibri" pitchFamily="34" charset="0"/>
                 <a:ea typeface="Calibri" pitchFamily="34" charset="-122"/>
                 <a:cs typeface="Calibri" pitchFamily="34" charset="-120"/>
               </a:rPr>
-              <a:t>(question × country) pairs</a:t>
-            </a:r>
-            <a:endParaRPr lang="en-US" sz="1400" dirty="0"/>
-          </a:p>
-          <a:p>
-            <a:pPr algn="ctr" indent="0" marL="0">
-              <a:lnSpc>
-                <a:spcPct val="105000"/>
-              </a:lnSpc>
-              <a:buNone/>
-            </a:pPr>
-            <a:r>
-              <a:rPr lang="en-US" sz="1400" dirty="0">
-                <a:solidFill>
-                  <a:srgbClr val="FFFFFF"/>
+              <a:t>Ask a language model a factual question and it returns a fluent answer whether or not the evidence exists. For an assessment like ODMI, much of it self-reported and across 20+ languages, a fabricated "yes" is worse than no answer at all.</a:t>
+            </a:r>
+            <a:endParaRPr lang="en-US" sz="1600" dirty="0"/>
+          </a:p>
+        </p:txBody>
+      </p:sp>
+      <p:sp>
+        <p:nvSpPr>
+          <p:cNvPr id="4" name="Text 2"/>
+          <p:cNvSpPr/>
+          <p:nvPr/>
+        </p:nvSpPr>
+        <p:spPr>
+          <a:xfrm>
+            <a:off x="640080" y="2423160"/>
+            <a:ext cx="5486400" cy="365760"/>
+          </a:xfrm>
+          <a:prstGeom prst="rect">
+            <a:avLst/>
+          </a:prstGeom>
+          <a:noFill/>
+          <a:ln/>
+        </p:spPr>
+        <p:txBody>
+          <a:bodyPr wrap="square" rtlCol="0" anchor="ctr"/>
+          <a:lstStyle/>
+          <a:p>
+            <a:pPr indent="0" marL="0">
+              <a:buNone/>
+            </a:pPr>
+            <a:r>
+              <a:rPr lang="en-US" sz="1700" b="1" dirty="0">
+                <a:solidFill>
+                  <a:srgbClr val="0E7C86"/>
                 </a:solidFill>
                 <a:latin typeface="Calibri" pitchFamily="34" charset="0"/>
                 <a:ea typeface="Calibri" pitchFamily="34" charset="-122"/>
                 <a:cs typeface="Calibri" pitchFamily="34" charset="-120"/>
               </a:rPr>
-              <a:t>assessed every cycle</a:t>
-            </a:r>
-            <a:endParaRPr lang="en-US" sz="1400" dirty="0"/>
-          </a:p>
-        </p:txBody>
-      </p:sp>
-      <p:sp>
-        <p:nvSpPr>
-          <p:cNvPr id="6" name="Text 4"/>
-          <p:cNvSpPr/>
-          <p:nvPr/>
-        </p:nvSpPr>
-        <p:spPr>
-          <a:xfrm>
-            <a:off x="777240" y="3429000"/>
-            <a:ext cx="3108960" cy="548640"/>
-          </a:xfrm>
-          <a:prstGeom prst="rect">
-            <a:avLst/>
-          </a:prstGeom>
-          <a:noFill/>
-          <a:ln/>
-        </p:spPr>
-        <p:txBody>
-          <a:bodyPr wrap="square" rtlCol="0" anchor="ctr"/>
-          <a:lstStyle/>
-          <a:p>
-            <a:pPr algn="ctr" indent="0" marL="0">
-              <a:buNone/>
-            </a:pPr>
-            <a:r>
-              <a:rPr lang="en-US" sz="1200" dirty="0">
-                <a:solidFill>
-                  <a:srgbClr val="CADCFC"/>
-                </a:solidFill>
-                <a:latin typeface="Calibri" pitchFamily="34" charset="0"/>
-                <a:ea typeface="Calibri" pitchFamily="34" charset="-122"/>
-                <a:cs typeface="Calibri" pitchFamily="34" charset="-120"/>
-              </a:rPr>
-              <a:t>36 countries  ·  143 questions  ·  20+ languages</a:t>
-            </a:r>
-            <a:endParaRPr lang="en-US" sz="1200" dirty="0"/>
-          </a:p>
-        </p:txBody>
-      </p:sp>
-      <p:sp>
-        <p:nvSpPr>
-          <p:cNvPr id="7" name="Shape 5"/>
-          <p:cNvSpPr/>
-          <p:nvPr/>
-        </p:nvSpPr>
-        <p:spPr>
-          <a:xfrm>
-            <a:off x="640080" y="4434840"/>
-            <a:ext cx="3383280" cy="1874520"/>
+              <a:t>The failure modes we fight</a:t>
+            </a:r>
+            <a:endParaRPr lang="en-US" sz="1700" dirty="0"/>
+          </a:p>
+        </p:txBody>
+      </p:sp>
+      <p:sp>
+        <p:nvSpPr>
+          <p:cNvPr id="5" name="Shape 3"/>
+          <p:cNvSpPr/>
+          <p:nvPr/>
+        </p:nvSpPr>
+        <p:spPr>
+          <a:xfrm>
+            <a:off x="640080" y="2880360"/>
+            <a:ext cx="5212080" cy="960120"/>
           </a:xfrm>
           <a:prstGeom prst="roundRect">
             <a:avLst>
-              <a:gd name="adj" fmla="val 3415"/>
-            </a:avLst>
-          </a:prstGeom>
-          <a:solidFill>
-            <a:srgbClr val="0F2A43"/>
-          </a:solidFill>
-          <a:ln/>
-          <a:effectLst>
-            <a:outerShdw sx="100000" sy="100000" kx="0" ky="0" algn="bl" rotWithShape="0" blurRad="88900" dist="25400" dir="8100000">
-              <a:srgbClr val="0F2A43">
-                <a:alpha val="12000"/>
-              </a:srgbClr>
-            </a:outerShdw>
-          </a:effectLst>
-        </p:spPr>
-      </p:sp>
-      <p:sp>
-        <p:nvSpPr>
-          <p:cNvPr id="8" name="Text 6"/>
-          <p:cNvSpPr/>
-          <p:nvPr/>
-        </p:nvSpPr>
-        <p:spPr>
-          <a:xfrm>
-            <a:off x="868680" y="4617720"/>
-            <a:ext cx="2926080" cy="320040"/>
-          </a:xfrm>
-          <a:prstGeom prst="rect">
-            <a:avLst/>
-          </a:prstGeom>
-          <a:noFill/>
-          <a:ln/>
-        </p:spPr>
-        <p:txBody>
-          <a:bodyPr wrap="square" rtlCol="0" anchor="ctr"/>
-          <a:lstStyle/>
-          <a:p>
-            <a:pPr indent="0" marL="0">
-              <a:buNone/>
-            </a:pPr>
-            <a:r>
-              <a:rPr lang="en-US" sz="1200" b="1" spc="200" kern="0" dirty="0">
-                <a:solidFill>
-                  <a:srgbClr val="5EC8C8"/>
-                </a:solidFill>
-                <a:latin typeface="Calibri" pitchFamily="34" charset="0"/>
-                <a:ea typeface="Calibri" pitchFamily="34" charset="-122"/>
-                <a:cs typeface="Calibri" pitchFamily="34" charset="-120"/>
-              </a:rPr>
-              <a:t>THE AIM</a:t>
-            </a:r>
-            <a:endParaRPr lang="en-US" sz="1200" dirty="0"/>
-          </a:p>
-        </p:txBody>
-      </p:sp>
-      <p:sp>
-        <p:nvSpPr>
-          <p:cNvPr id="9" name="Text 7"/>
-          <p:cNvSpPr/>
-          <p:nvPr/>
-        </p:nvSpPr>
-        <p:spPr>
-          <a:xfrm>
-            <a:off x="868680" y="4983480"/>
-            <a:ext cx="2971800" cy="1188720"/>
-          </a:xfrm>
-          <a:prstGeom prst="rect">
-            <a:avLst/>
-          </a:prstGeom>
-          <a:noFill/>
-          <a:ln/>
-        </p:spPr>
-        <p:txBody>
-          <a:bodyPr wrap="square" rtlCol="0" anchor="ctr"/>
-          <a:lstStyle/>
-          <a:p>
-            <a:pPr indent="0" marL="0">
-              <a:lnSpc>
-                <a:spcPct val="110000"/>
-              </a:lnSpc>
-              <a:buNone/>
-            </a:pPr>
-            <a:r>
-              <a:rPr lang="en-US" sz="1500" dirty="0">
-                <a:solidFill>
-                  <a:srgbClr val="FFFFFF"/>
-                </a:solidFill>
-                <a:latin typeface="Calibri" pitchFamily="34" charset="0"/>
-                <a:ea typeface="Calibri" pitchFamily="34" charset="-122"/>
-                <a:cs typeface="Calibri" pitchFamily="34" charset="-120"/>
-              </a:rPr>
-              <a:t>Answer them automatically, trace every answer to a source, and flag where the self-report does not hold up.</a:t>
-            </a:r>
-            <a:endParaRPr lang="en-US" sz="1500" dirty="0"/>
-          </a:p>
-        </p:txBody>
-      </p:sp>
-      <p:sp>
-        <p:nvSpPr>
-          <p:cNvPr id="10" name="Text 8"/>
-          <p:cNvSpPr/>
-          <p:nvPr/>
-        </p:nvSpPr>
-        <p:spPr>
-          <a:xfrm>
-            <a:off x="4434840" y="1325880"/>
-            <a:ext cx="7315200" cy="411480"/>
-          </a:xfrm>
-          <a:prstGeom prst="rect">
-            <a:avLst/>
-          </a:prstGeom>
-          <a:noFill/>
-          <a:ln/>
-        </p:spPr>
-        <p:txBody>
-          <a:bodyPr wrap="square" rtlCol="0" anchor="ctr"/>
-          <a:lstStyle/>
-          <a:p>
-            <a:pPr indent="0" marL="0">
-              <a:buNone/>
-            </a:pPr>
-            <a:r>
-              <a:rPr lang="en-US" sz="1800" b="1" dirty="0">
-                <a:solidFill>
-                  <a:srgbClr val="0E7C86"/>
-                </a:solidFill>
-                <a:latin typeface="Calibri" pitchFamily="34" charset="0"/>
-                <a:ea typeface="Calibri" pitchFamily="34" charset="-122"/>
-                <a:cs typeface="Calibri" pitchFamily="34" charset="-120"/>
-              </a:rPr>
-              <a:t>Why it is hard today</a:t>
-            </a:r>
-            <a:endParaRPr lang="en-US" sz="1800" dirty="0"/>
-          </a:p>
-        </p:txBody>
-      </p:sp>
-      <p:sp>
-        <p:nvSpPr>
-          <p:cNvPr id="11" name="Shape 9"/>
-          <p:cNvSpPr/>
-          <p:nvPr/>
-        </p:nvSpPr>
-        <p:spPr>
-          <a:xfrm>
-            <a:off x="4434840" y="1828800"/>
-            <a:ext cx="3566160" cy="2057400"/>
-          </a:xfrm>
-          <a:prstGeom prst="roundRect">
-            <a:avLst>
-              <a:gd name="adj" fmla="val 3111"/>
+              <a:gd name="adj" fmla="val 5714"/>
             </a:avLst>
           </a:prstGeom>
           <a:solidFill>
@@ -2996,33 +2521,33 @@
       </p:sp>
       <p:sp>
         <p:nvSpPr>
-          <p:cNvPr id="12" name="Shape 10"/>
-          <p:cNvSpPr/>
-          <p:nvPr/>
-        </p:nvSpPr>
-        <p:spPr>
-          <a:xfrm>
-            <a:off x="4709160" y="2121408"/>
+          <p:cNvPr id="6" name="Shape 4"/>
+          <p:cNvSpPr/>
+          <p:nvPr/>
+        </p:nvSpPr>
+        <p:spPr>
+          <a:xfrm>
+            <a:off x="896112" y="3136392"/>
             <a:ext cx="457200" cy="457200"/>
           </a:xfrm>
           <a:prstGeom prst="ellipse">
             <a:avLst/>
           </a:prstGeom>
           <a:solidFill>
-            <a:srgbClr val="0E7C86"/>
-          </a:solidFill>
-          <a:ln/>
-        </p:spPr>
-      </p:sp>
-      <p:sp>
-        <p:nvSpPr>
-          <p:cNvPr id="13" name="Text 11"/>
-          <p:cNvSpPr/>
-          <p:nvPr/>
-        </p:nvSpPr>
-        <p:spPr>
-          <a:xfrm>
-            <a:off x="4709160" y="2121408"/>
+            <a:srgbClr val="B45309"/>
+          </a:solidFill>
+          <a:ln/>
+        </p:spPr>
+      </p:sp>
+      <p:sp>
+        <p:nvSpPr>
+          <p:cNvPr id="7" name="Text 5"/>
+          <p:cNvSpPr/>
+          <p:nvPr/>
+        </p:nvSpPr>
+        <p:spPr>
+          <a:xfrm>
+            <a:off x="896112" y="3136392"/>
             <a:ext cx="457200" cy="457200"/>
           </a:xfrm>
           <a:prstGeom prst="rect">
@@ -3039,7 +2564,7 @@
               <a:buNone/>
             </a:pPr>
             <a:r>
-              <a:rPr lang="en-US" sz="1600" b="1" dirty="0">
+              <a:rPr lang="en-US" sz="1800" b="1" dirty="0">
                 <a:solidFill>
                   <a:srgbClr val="FFFFFF"/>
                 </a:solidFill>
@@ -3047,22 +2572,22 @@
                 <a:ea typeface="Calibri" pitchFamily="34" charset="-122"/>
                 <a:cs typeface="Calibri" pitchFamily="34" charset="-120"/>
               </a:rPr>
-              <a:t>1</a:t>
-            </a:r>
-            <a:endParaRPr lang="en-US" sz="1600" dirty="0"/>
-          </a:p>
-        </p:txBody>
-      </p:sp>
-      <p:sp>
-        <p:nvSpPr>
-          <p:cNvPr id="14" name="Text 12"/>
-          <p:cNvSpPr/>
-          <p:nvPr/>
-        </p:nvSpPr>
-        <p:spPr>
-          <a:xfrm>
-            <a:off x="5349240" y="2121408"/>
-            <a:ext cx="2468880" cy="457200"/>
+              <a:t>!</a:t>
+            </a:r>
+            <a:endParaRPr lang="en-US" sz="1800" dirty="0"/>
+          </a:p>
+        </p:txBody>
+      </p:sp>
+      <p:sp>
+        <p:nvSpPr>
+          <p:cNvPr id="8" name="Text 6"/>
+          <p:cNvSpPr/>
+          <p:nvPr/>
+        </p:nvSpPr>
+        <p:spPr>
+          <a:xfrm>
+            <a:off x="1536192" y="3026664"/>
+            <a:ext cx="4114800" cy="329184"/>
           </a:xfrm>
           <a:prstGeom prst="rect">
             <a:avLst/>
@@ -3078,7 +2603,7 @@
               <a:buNone/>
             </a:pPr>
             <a:r>
-              <a:rPr lang="en-US" sz="1700" b="1" dirty="0">
+              <a:rPr lang="en-US" sz="1550" b="1" dirty="0">
                 <a:solidFill>
                   <a:srgbClr val="0F2A43"/>
                 </a:solidFill>
@@ -3086,22 +2611,22 @@
                 <a:ea typeface="Calibri" pitchFamily="34" charset="-122"/>
                 <a:cs typeface="Calibri" pitchFamily="34" charset="-120"/>
               </a:rPr>
-              <a:t>Self-reported</a:t>
-            </a:r>
-            <a:endParaRPr lang="en-US" sz="1700" dirty="0"/>
-          </a:p>
-        </p:txBody>
-      </p:sp>
-      <p:sp>
-        <p:nvSpPr>
-          <p:cNvPr id="15" name="Text 13"/>
-          <p:cNvSpPr/>
-          <p:nvPr/>
-        </p:nvSpPr>
-        <p:spPr>
-          <a:xfrm>
-            <a:off x="4727448" y="2743200"/>
-            <a:ext cx="3017520" cy="1005840"/>
+              <a:t>Fabrication</a:t>
+            </a:r>
+            <a:endParaRPr lang="en-US" sz="1550" dirty="0"/>
+          </a:p>
+        </p:txBody>
+      </p:sp>
+      <p:sp>
+        <p:nvSpPr>
+          <p:cNvPr id="9" name="Text 7"/>
+          <p:cNvSpPr/>
+          <p:nvPr/>
+        </p:nvSpPr>
+        <p:spPr>
+          <a:xfrm>
+            <a:off x="1536192" y="3337560"/>
+            <a:ext cx="4114800" cy="457200"/>
           </a:xfrm>
           <a:prstGeom prst="rect">
             <a:avLst/>
@@ -3115,12 +2640,12 @@
           <a:p>
             <a:pPr indent="0" marL="0">
               <a:lnSpc>
-                <a:spcPct val="105000"/>
+                <a:spcPct val="100000"/>
               </a:lnSpc>
               <a:buNone/>
             </a:pPr>
             <a:r>
-              <a:rPr lang="en-US" sz="1350" dirty="0">
+              <a:rPr lang="en-US" sz="1300" dirty="0">
                 <a:solidFill>
                   <a:srgbClr val="1E293B"/>
                 </a:solidFill>
@@ -3128,26 +2653,26 @@
                 <a:ea typeface="Calibri" pitchFamily="34" charset="-122"/>
                 <a:cs typeface="Calibri" pitchFamily="34" charset="-120"/>
               </a:rPr>
-              <a:t>Countries grade their own homework, so figures can be inflated.</a:t>
-            </a:r>
-            <a:endParaRPr lang="en-US" sz="1350" dirty="0"/>
-          </a:p>
-        </p:txBody>
-      </p:sp>
-      <p:sp>
-        <p:nvSpPr>
-          <p:cNvPr id="16" name="Shape 14"/>
-          <p:cNvSpPr/>
-          <p:nvPr/>
-        </p:nvSpPr>
-        <p:spPr>
-          <a:xfrm>
-            <a:off x="8275320" y="1828800"/>
-            <a:ext cx="3566160" cy="2057400"/>
+              <a:t>The model fills a gap with plausible text instead of evidence.</a:t>
+            </a:r>
+            <a:endParaRPr lang="en-US" sz="1300" dirty="0"/>
+          </a:p>
+        </p:txBody>
+      </p:sp>
+      <p:sp>
+        <p:nvSpPr>
+          <p:cNvPr id="10" name="Shape 8"/>
+          <p:cNvSpPr/>
+          <p:nvPr/>
+        </p:nvSpPr>
+        <p:spPr>
+          <a:xfrm>
+            <a:off x="640080" y="3986784"/>
+            <a:ext cx="5212080" cy="960120"/>
           </a:xfrm>
           <a:prstGeom prst="roundRect">
             <a:avLst>
-              <a:gd name="adj" fmla="val 3111"/>
+              <a:gd name="adj" fmla="val 5714"/>
             </a:avLst>
           </a:prstGeom>
           <a:solidFill>
@@ -3170,33 +2695,33 @@
       </p:sp>
       <p:sp>
         <p:nvSpPr>
-          <p:cNvPr id="17" name="Shape 15"/>
-          <p:cNvSpPr/>
-          <p:nvPr/>
-        </p:nvSpPr>
-        <p:spPr>
-          <a:xfrm>
-            <a:off x="8549640" y="2121408"/>
+          <p:cNvPr id="11" name="Shape 9"/>
+          <p:cNvSpPr/>
+          <p:nvPr/>
+        </p:nvSpPr>
+        <p:spPr>
+          <a:xfrm>
+            <a:off x="896112" y="4242816"/>
             <a:ext cx="457200" cy="457200"/>
           </a:xfrm>
           <a:prstGeom prst="ellipse">
             <a:avLst/>
           </a:prstGeom>
           <a:solidFill>
-            <a:srgbClr val="0E7C86"/>
-          </a:solidFill>
-          <a:ln/>
-        </p:spPr>
-      </p:sp>
-      <p:sp>
-        <p:nvSpPr>
-          <p:cNvPr id="18" name="Text 16"/>
-          <p:cNvSpPr/>
-          <p:nvPr/>
-        </p:nvSpPr>
-        <p:spPr>
-          <a:xfrm>
-            <a:off x="8549640" y="2121408"/>
+            <a:srgbClr val="B45309"/>
+          </a:solidFill>
+          <a:ln/>
+        </p:spPr>
+      </p:sp>
+      <p:sp>
+        <p:nvSpPr>
+          <p:cNvPr id="12" name="Text 10"/>
+          <p:cNvSpPr/>
+          <p:nvPr/>
+        </p:nvSpPr>
+        <p:spPr>
+          <a:xfrm>
+            <a:off x="896112" y="4242816"/>
             <a:ext cx="457200" cy="457200"/>
           </a:xfrm>
           <a:prstGeom prst="rect">
@@ -3213,7 +2738,7 @@
               <a:buNone/>
             </a:pPr>
             <a:r>
-              <a:rPr lang="en-US" sz="1600" b="1" dirty="0">
+              <a:rPr lang="en-US" sz="1800" b="1" dirty="0">
                 <a:solidFill>
                   <a:srgbClr val="FFFFFF"/>
                 </a:solidFill>
@@ -3221,22 +2746,22 @@
                 <a:ea typeface="Calibri" pitchFamily="34" charset="-122"/>
                 <a:cs typeface="Calibri" pitchFamily="34" charset="-120"/>
               </a:rPr>
-              <a:t>2</a:t>
-            </a:r>
-            <a:endParaRPr lang="en-US" sz="1600" dirty="0"/>
-          </a:p>
-        </p:txBody>
-      </p:sp>
-      <p:sp>
-        <p:nvSpPr>
-          <p:cNvPr id="19" name="Text 17"/>
-          <p:cNvSpPr/>
-          <p:nvPr/>
-        </p:nvSpPr>
-        <p:spPr>
-          <a:xfrm>
-            <a:off x="9189720" y="2121408"/>
-            <a:ext cx="2468880" cy="457200"/>
+              <a:t>!</a:t>
+            </a:r>
+            <a:endParaRPr lang="en-US" sz="1800" dirty="0"/>
+          </a:p>
+        </p:txBody>
+      </p:sp>
+      <p:sp>
+        <p:nvSpPr>
+          <p:cNvPr id="13" name="Text 11"/>
+          <p:cNvSpPr/>
+          <p:nvPr/>
+        </p:nvSpPr>
+        <p:spPr>
+          <a:xfrm>
+            <a:off x="1536192" y="4133088"/>
+            <a:ext cx="4114800" cy="329184"/>
           </a:xfrm>
           <a:prstGeom prst="rect">
             <a:avLst/>
@@ -3252,7 +2777,7 @@
               <a:buNone/>
             </a:pPr>
             <a:r>
-              <a:rPr lang="en-US" sz="1700" b="1" dirty="0">
+              <a:rPr lang="en-US" sz="1550" b="1" dirty="0">
                 <a:solidFill>
                   <a:srgbClr val="0F2A43"/>
                 </a:solidFill>
@@ -3260,22 +2785,22 @@
                 <a:ea typeface="Calibri" pitchFamily="34" charset="-122"/>
                 <a:cs typeface="Calibri" pitchFamily="34" charset="-120"/>
               </a:rPr>
-              <a:t>Manual and slow</a:t>
-            </a:r>
-            <a:endParaRPr lang="en-US" sz="1700" dirty="0"/>
-          </a:p>
-        </p:txBody>
-      </p:sp>
-      <p:sp>
-        <p:nvSpPr>
-          <p:cNvPr id="20" name="Text 18"/>
-          <p:cNvSpPr/>
-          <p:nvPr/>
-        </p:nvSpPr>
-        <p:spPr>
-          <a:xfrm>
-            <a:off x="8567928" y="2743200"/>
-            <a:ext cx="3017520" cy="1005840"/>
+              <a:t>Overconfidence</a:t>
+            </a:r>
+            <a:endParaRPr lang="en-US" sz="1550" dirty="0"/>
+          </a:p>
+        </p:txBody>
+      </p:sp>
+      <p:sp>
+        <p:nvSpPr>
+          <p:cNvPr id="14" name="Text 12"/>
+          <p:cNvSpPr/>
+          <p:nvPr/>
+        </p:nvSpPr>
+        <p:spPr>
+          <a:xfrm>
+            <a:off x="1536192" y="4443984"/>
+            <a:ext cx="4114800" cy="457200"/>
           </a:xfrm>
           <a:prstGeom prst="rect">
             <a:avLst/>
@@ -3289,12 +2814,12 @@
           <a:p>
             <a:pPr indent="0" marL="0">
               <a:lnSpc>
-                <a:spcPct val="105000"/>
+                <a:spcPct val="100000"/>
               </a:lnSpc>
               <a:buNone/>
             </a:pPr>
             <a:r>
-              <a:rPr lang="en-US" sz="1350" dirty="0">
+              <a:rPr lang="en-US" sz="1300" dirty="0">
                 <a:solidFill>
                   <a:srgbClr val="1E293B"/>
                 </a:solidFill>
@@ -3302,26 +2827,26 @@
                 <a:ea typeface="Calibri" pitchFamily="34" charset="-122"/>
                 <a:cs typeface="Calibri" pitchFamily="34" charset="-120"/>
               </a:rPr>
-              <a:t>Expert review, one country at a time, every cycle.</a:t>
-            </a:r>
-            <a:endParaRPr lang="en-US" sz="1350" dirty="0"/>
-          </a:p>
-        </p:txBody>
-      </p:sp>
-      <p:sp>
-        <p:nvSpPr>
-          <p:cNvPr id="21" name="Shape 19"/>
-          <p:cNvSpPr/>
-          <p:nvPr/>
-        </p:nvSpPr>
-        <p:spPr>
-          <a:xfrm>
-            <a:off x="4434840" y="4160520"/>
-            <a:ext cx="3566160" cy="2057400"/>
+              <a:t>A wrong answer arrives sounding as certain as a right one.</a:t>
+            </a:r>
+            <a:endParaRPr lang="en-US" sz="1300" dirty="0"/>
+          </a:p>
+        </p:txBody>
+      </p:sp>
+      <p:sp>
+        <p:nvSpPr>
+          <p:cNvPr id="15" name="Shape 13"/>
+          <p:cNvSpPr/>
+          <p:nvPr/>
+        </p:nvSpPr>
+        <p:spPr>
+          <a:xfrm>
+            <a:off x="640080" y="5093208"/>
+            <a:ext cx="5212080" cy="960120"/>
           </a:xfrm>
           <a:prstGeom prst="roundRect">
             <a:avLst>
-              <a:gd name="adj" fmla="val 3111"/>
+              <a:gd name="adj" fmla="val 5714"/>
             </a:avLst>
           </a:prstGeom>
           <a:solidFill>
@@ -3344,33 +2869,33 @@
       </p:sp>
       <p:sp>
         <p:nvSpPr>
-          <p:cNvPr id="22" name="Shape 20"/>
-          <p:cNvSpPr/>
-          <p:nvPr/>
-        </p:nvSpPr>
-        <p:spPr>
-          <a:xfrm>
-            <a:off x="4709160" y="4453128"/>
+          <p:cNvPr id="16" name="Shape 14"/>
+          <p:cNvSpPr/>
+          <p:nvPr/>
+        </p:nvSpPr>
+        <p:spPr>
+          <a:xfrm>
+            <a:off x="896112" y="5349240"/>
             <a:ext cx="457200" cy="457200"/>
           </a:xfrm>
           <a:prstGeom prst="ellipse">
             <a:avLst/>
           </a:prstGeom>
           <a:solidFill>
-            <a:srgbClr val="0E7C86"/>
-          </a:solidFill>
-          <a:ln/>
-        </p:spPr>
-      </p:sp>
-      <p:sp>
-        <p:nvSpPr>
-          <p:cNvPr id="23" name="Text 21"/>
-          <p:cNvSpPr/>
-          <p:nvPr/>
-        </p:nvSpPr>
-        <p:spPr>
-          <a:xfrm>
-            <a:off x="4709160" y="4453128"/>
+            <a:srgbClr val="B45309"/>
+          </a:solidFill>
+          <a:ln/>
+        </p:spPr>
+      </p:sp>
+      <p:sp>
+        <p:nvSpPr>
+          <p:cNvPr id="17" name="Text 15"/>
+          <p:cNvSpPr/>
+          <p:nvPr/>
+        </p:nvSpPr>
+        <p:spPr>
+          <a:xfrm>
+            <a:off x="896112" y="5349240"/>
             <a:ext cx="457200" cy="457200"/>
           </a:xfrm>
           <a:prstGeom prst="rect">
@@ -3387,7 +2912,7 @@
               <a:buNone/>
             </a:pPr>
             <a:r>
-              <a:rPr lang="en-US" sz="1600" b="1" dirty="0">
+              <a:rPr lang="en-US" sz="1800" b="1" dirty="0">
                 <a:solidFill>
                   <a:srgbClr val="FFFFFF"/>
                 </a:solidFill>
@@ -3395,22 +2920,22 @@
                 <a:ea typeface="Calibri" pitchFamily="34" charset="-122"/>
                 <a:cs typeface="Calibri" pitchFamily="34" charset="-120"/>
               </a:rPr>
-              <a:t>3</a:t>
-            </a:r>
-            <a:endParaRPr lang="en-US" sz="1600" dirty="0"/>
-          </a:p>
-        </p:txBody>
-      </p:sp>
-      <p:sp>
-        <p:nvSpPr>
-          <p:cNvPr id="24" name="Text 22"/>
-          <p:cNvSpPr/>
-          <p:nvPr/>
-        </p:nvSpPr>
-        <p:spPr>
-          <a:xfrm>
-            <a:off x="5349240" y="4453128"/>
-            <a:ext cx="2468880" cy="457200"/>
+              <a:t>!</a:t>
+            </a:r>
+            <a:endParaRPr lang="en-US" sz="1800" dirty="0"/>
+          </a:p>
+        </p:txBody>
+      </p:sp>
+      <p:sp>
+        <p:nvSpPr>
+          <p:cNvPr id="18" name="Text 16"/>
+          <p:cNvSpPr/>
+          <p:nvPr/>
+        </p:nvSpPr>
+        <p:spPr>
+          <a:xfrm>
+            <a:off x="1536192" y="5239512"/>
+            <a:ext cx="4114800" cy="329184"/>
           </a:xfrm>
           <a:prstGeom prst="rect">
             <a:avLst/>
@@ -3426,7 +2951,7 @@
               <a:buNone/>
             </a:pPr>
             <a:r>
-              <a:rPr lang="en-US" sz="1700" b="1" dirty="0">
+              <a:rPr lang="en-US" sz="1550" b="1" dirty="0">
                 <a:solidFill>
                   <a:srgbClr val="0F2A43"/>
                 </a:solidFill>
@@ -3434,22 +2959,22 @@
                 <a:ea typeface="Calibri" pitchFamily="34" charset="-122"/>
                 <a:cs typeface="Calibri" pitchFamily="34" charset="-120"/>
               </a:rPr>
-              <a:t>Subjective</a:t>
-            </a:r>
-            <a:endParaRPr lang="en-US" sz="1700" dirty="0"/>
-          </a:p>
-        </p:txBody>
-      </p:sp>
-      <p:sp>
-        <p:nvSpPr>
-          <p:cNvPr id="25" name="Text 23"/>
-          <p:cNvSpPr/>
-          <p:nvPr/>
-        </p:nvSpPr>
-        <p:spPr>
-          <a:xfrm>
-            <a:off x="4727448" y="5074920"/>
-            <a:ext cx="3017520" cy="1005840"/>
+              <a:t>No receipts</a:t>
+            </a:r>
+            <a:endParaRPr lang="en-US" sz="1550" dirty="0"/>
+          </a:p>
+        </p:txBody>
+      </p:sp>
+      <p:sp>
+        <p:nvSpPr>
+          <p:cNvPr id="19" name="Text 17"/>
+          <p:cNvSpPr/>
+          <p:nvPr/>
+        </p:nvSpPr>
+        <p:spPr>
+          <a:xfrm>
+            <a:off x="1536192" y="5550408"/>
+            <a:ext cx="4114800" cy="457200"/>
           </a:xfrm>
           <a:prstGeom prst="rect">
             <a:avLst/>
@@ -3463,12 +2988,12 @@
           <a:p>
             <a:pPr indent="0" marL="0">
               <a:lnSpc>
-                <a:spcPct val="105000"/>
+                <a:spcPct val="100000"/>
               </a:lnSpc>
               <a:buNone/>
             </a:pPr>
             <a:r>
-              <a:rPr lang="en-US" sz="1350" dirty="0">
+              <a:rPr lang="en-US" sz="1300" dirty="0">
                 <a:solidFill>
                   <a:srgbClr val="1E293B"/>
                 </a:solidFill>
@@ -3476,37 +3001,32 @@
                 <a:ea typeface="Calibri" pitchFamily="34" charset="-122"/>
                 <a:cs typeface="Calibri" pitchFamily="34" charset="-120"/>
               </a:rPr>
-              <a:t>Assessors read the same question in different ways.</a:t>
-            </a:r>
-            <a:endParaRPr lang="en-US" sz="1350" dirty="0"/>
-          </a:p>
-        </p:txBody>
-      </p:sp>
-      <p:sp>
-        <p:nvSpPr>
-          <p:cNvPr id="26" name="Shape 24"/>
-          <p:cNvSpPr/>
-          <p:nvPr/>
-        </p:nvSpPr>
-        <p:spPr>
-          <a:xfrm>
-            <a:off x="8275320" y="4160520"/>
-            <a:ext cx="3566160" cy="2057400"/>
+              <a:t>A bare label cannot be audited, traced, or trusted.</a:t>
+            </a:r>
+            <a:endParaRPr lang="en-US" sz="1300" dirty="0"/>
+          </a:p>
+        </p:txBody>
+      </p:sp>
+      <p:sp>
+        <p:nvSpPr>
+          <p:cNvPr id="20" name="Shape 18"/>
+          <p:cNvSpPr/>
+          <p:nvPr/>
+        </p:nvSpPr>
+        <p:spPr>
+          <a:xfrm>
+            <a:off x="6172200" y="2697480"/>
+            <a:ext cx="5349240" cy="3474720"/>
           </a:xfrm>
           <a:prstGeom prst="roundRect">
             <a:avLst>
-              <a:gd name="adj" fmla="val 3111"/>
+              <a:gd name="adj" fmla="val 1579"/>
             </a:avLst>
           </a:prstGeom>
           <a:solidFill>
-            <a:srgbClr val="F1F5F9"/>
-          </a:solidFill>
-          <a:ln w="12700">
-            <a:solidFill>
-              <a:srgbClr val="CBD5E1"/>
-            </a:solidFill>
-            <a:prstDash val="solid"/>
-          </a:ln>
+            <a:srgbClr val="0F2A43"/>
+          </a:solidFill>
+          <a:ln/>
           <a:effectLst>
             <a:outerShdw sx="100000" sy="100000" kx="0" ky="0" algn="bl" rotWithShape="0" blurRad="88900" dist="25400" dir="8100000">
               <a:srgbClr val="0F2A43">
@@ -3518,34 +3038,14 @@
       </p:sp>
       <p:sp>
         <p:nvSpPr>
-          <p:cNvPr id="27" name="Shape 25"/>
-          <p:cNvSpPr/>
-          <p:nvPr/>
-        </p:nvSpPr>
-        <p:spPr>
-          <a:xfrm>
-            <a:off x="8549640" y="4453128"/>
-            <a:ext cx="457200" cy="457200"/>
-          </a:xfrm>
-          <a:prstGeom prst="ellipse">
-            <a:avLst/>
-          </a:prstGeom>
-          <a:solidFill>
-            <a:srgbClr val="0E7C86"/>
-          </a:solidFill>
-          <a:ln/>
-        </p:spPr>
-      </p:sp>
-      <p:sp>
-        <p:nvSpPr>
-          <p:cNvPr id="28" name="Text 26"/>
-          <p:cNvSpPr/>
-          <p:nvPr/>
-        </p:nvSpPr>
-        <p:spPr>
-          <a:xfrm>
-            <a:off x="8549640" y="4453128"/>
-            <a:ext cx="457200" cy="457200"/>
+          <p:cNvPr id="21" name="Text 19"/>
+          <p:cNvSpPr/>
+          <p:nvPr/>
+        </p:nvSpPr>
+        <p:spPr>
+          <a:xfrm>
+            <a:off x="6446520" y="2926080"/>
+            <a:ext cx="8229600" cy="292608"/>
           </a:xfrm>
           <a:prstGeom prst="rect">
             <a:avLst/>
@@ -3557,34 +3057,34 @@
           <a:bodyPr wrap="square" rtlCol="0" anchor="ctr"/>
           <a:lstStyle/>
           <a:p>
-            <a:pPr algn="ctr" indent="0" marL="0">
-              <a:buNone/>
-            </a:pPr>
-            <a:r>
-              <a:rPr lang="en-US" sz="1600" b="1" dirty="0">
-                <a:solidFill>
-                  <a:srgbClr val="FFFFFF"/>
+            <a:pPr indent="0" marL="0">
+              <a:buNone/>
+            </a:pPr>
+            <a:r>
+              <a:rPr lang="en-US" sz="1250" b="1" spc="200" kern="0" dirty="0">
+                <a:solidFill>
+                  <a:srgbClr val="5EC8C8"/>
                 </a:solidFill>
                 <a:latin typeface="Calibri" pitchFamily="34" charset="0"/>
                 <a:ea typeface="Calibri" pitchFamily="34" charset="-122"/>
                 <a:cs typeface="Calibri" pitchFamily="34" charset="-120"/>
               </a:rPr>
-              <a:t>4</a:t>
-            </a:r>
-            <a:endParaRPr lang="en-US" sz="1600" dirty="0"/>
-          </a:p>
-        </p:txBody>
-      </p:sp>
-      <p:sp>
-        <p:nvSpPr>
-          <p:cNvPr id="29" name="Text 27"/>
-          <p:cNvSpPr/>
-          <p:nvPr/>
-        </p:nvSpPr>
-        <p:spPr>
-          <a:xfrm>
-            <a:off x="9189720" y="4453128"/>
-            <a:ext cx="2468880" cy="457200"/>
+              <a:t>THE RESEARCH QUESTION</a:t>
+            </a:r>
+            <a:endParaRPr lang="en-US" sz="1250" dirty="0"/>
+          </a:p>
+        </p:txBody>
+      </p:sp>
+      <p:sp>
+        <p:nvSpPr>
+          <p:cNvPr id="22" name="Text 20"/>
+          <p:cNvSpPr/>
+          <p:nvPr/>
+        </p:nvSpPr>
+        <p:spPr>
+          <a:xfrm>
+            <a:off x="6446520" y="3337560"/>
+            <a:ext cx="4846320" cy="1828800"/>
           </a:xfrm>
           <a:prstGeom prst="rect">
             <a:avLst/>
@@ -3597,62 +3097,65 @@
           <a:lstStyle/>
           <a:p>
             <a:pPr indent="0" marL="0">
-              <a:buNone/>
-            </a:pPr>
-            <a:r>
-              <a:rPr lang="en-US" sz="1700" b="1" dirty="0">
-                <a:solidFill>
-                  <a:srgbClr val="0F2A43"/>
+              <a:lnSpc>
+                <a:spcPct val="118000"/>
+              </a:lnSpc>
+              <a:buNone/>
+            </a:pPr>
+            <a:r>
+              <a:rPr lang="en-US" sz="2100" i="1" dirty="0">
+                <a:solidFill>
+                  <a:srgbClr val="FFFFFF"/>
+                </a:solidFill>
+                <a:latin typeface="Georgia" pitchFamily="34" charset="0"/>
+                <a:ea typeface="Georgia" pitchFamily="34" charset="-122"/>
+                <a:cs typeface="Georgia" pitchFamily="34" charset="-120"/>
+              </a:rPr>
+              <a:t>How do you build an agent that asserts only what a source supports, abstains when it cannot, and how do you prove it is not bluffing?</a:t>
+            </a:r>
+            <a:endParaRPr lang="en-US" sz="2100" dirty="0"/>
+          </a:p>
+        </p:txBody>
+      </p:sp>
+      <p:sp>
+        <p:nvSpPr>
+          <p:cNvPr id="23" name="Text 21"/>
+          <p:cNvSpPr/>
+          <p:nvPr/>
+        </p:nvSpPr>
+        <p:spPr>
+          <a:xfrm>
+            <a:off x="6446520" y="5440680"/>
+            <a:ext cx="4846320" cy="640080"/>
+          </a:xfrm>
+          <a:prstGeom prst="rect">
+            <a:avLst/>
+          </a:prstGeom>
+          <a:noFill/>
+          <a:ln/>
+        </p:spPr>
+        <p:txBody>
+          <a:bodyPr wrap="square" rtlCol="0" anchor="ctr"/>
+          <a:lstStyle/>
+          <a:p>
+            <a:pPr indent="0" marL="0">
+              <a:lnSpc>
+                <a:spcPct val="105000"/>
+              </a:lnSpc>
+              <a:buNone/>
+            </a:pPr>
+            <a:r>
+              <a:rPr lang="en-US" sz="1300" dirty="0">
+                <a:solidFill>
+                  <a:srgbClr val="CADCFC"/>
                 </a:solidFill>
                 <a:latin typeface="Calibri" pitchFamily="34" charset="0"/>
                 <a:ea typeface="Calibri" pitchFamily="34" charset="-122"/>
                 <a:cs typeface="Calibri" pitchFamily="34" charset="-120"/>
               </a:rPr>
-              <a:t>Multilingual</a:t>
-            </a:r>
-            <a:endParaRPr lang="en-US" sz="1700" dirty="0"/>
-          </a:p>
-        </p:txBody>
-      </p:sp>
-      <p:sp>
-        <p:nvSpPr>
-          <p:cNvPr id="30" name="Text 28"/>
-          <p:cNvSpPr/>
-          <p:nvPr/>
-        </p:nvSpPr>
-        <p:spPr>
-          <a:xfrm>
-            <a:off x="8567928" y="5074920"/>
-            <a:ext cx="3017520" cy="1005840"/>
-          </a:xfrm>
-          <a:prstGeom prst="rect">
-            <a:avLst/>
-          </a:prstGeom>
-          <a:noFill/>
-          <a:ln/>
-        </p:spPr>
-        <p:txBody>
-          <a:bodyPr wrap="square" rtlCol="0" anchor="ctr"/>
-          <a:lstStyle/>
-          <a:p>
-            <a:pPr indent="0" marL="0">
-              <a:lnSpc>
-                <a:spcPct val="105000"/>
-              </a:lnSpc>
-              <a:buNone/>
-            </a:pPr>
-            <a:r>
-              <a:rPr lang="en-US" sz="1350" dirty="0">
-                <a:solidFill>
-                  <a:srgbClr val="1E293B"/>
-                </a:solidFill>
-                <a:latin typeface="Calibri" pitchFamily="34" charset="0"/>
-                <a:ea typeface="Calibri" pitchFamily="34" charset="-122"/>
-                <a:cs typeface="Calibri" pitchFamily="34" charset="-120"/>
-              </a:rPr>
-              <a:t>20+ languages; no single reviewer can cover them all.</a:t>
-            </a:r>
-            <a:endParaRPr lang="en-US" sz="1350" dirty="0"/>
+              <a:t>ODMI is a hard testbed: 5,148 pairs, self-reported answers to check, 36 countries.</a:t>
+            </a:r>
+            <a:endParaRPr lang="en-US" sz="1300" dirty="0"/>
           </a:p>
         </p:txBody>
       </p:sp>
@@ -3697,7 +3200,7 @@
         <p:spPr>
           <a:xfrm>
             <a:off x="640080" y="365760"/>
-            <a:ext cx="10972800" cy="640080"/>
+            <a:ext cx="11338560" cy="640080"/>
           </a:xfrm>
           <a:prstGeom prst="rect">
             <a:avLst/>
@@ -3713,7 +3216,7 @@
               <a:buNone/>
             </a:pPr>
             <a:r>
-              <a:rPr lang="en-US" sz="3200" b="1" dirty="0">
+              <a:rPr lang="en-US" sz="3000" b="1" dirty="0">
                 <a:solidFill>
                   <a:srgbClr val="0F2A43"/>
                 </a:solidFill>
@@ -3721,9 +3224,9 @@
                 <a:ea typeface="Georgia" pitchFamily="34" charset="-122"/>
                 <a:cs typeface="Georgia" pitchFamily="34" charset="-120"/>
               </a:rPr>
-              <a:t>How the swarm works</a:t>
-            </a:r>
-            <a:endParaRPr lang="en-US" sz="3200" dirty="0"/>
+              <a:t>The Researcher: constrained so it cannot invent</a:t>
+            </a:r>
+            <a:endParaRPr lang="en-US" sz="3000" dirty="0"/>
           </a:p>
         </p:txBody>
       </p:sp>
@@ -3743,7 +3246,7 @@
         </p:blipFill>
         <p:spPr>
           <a:xfrm>
-            <a:off x="836676" y="1051560"/>
+            <a:off x="836676" y="1024128"/>
             <a:ext cx="10515600" cy="5217337"/>
           </a:xfrm>
           <a:prstGeom prst="rect">
@@ -3759,8 +3262,8 @@
         </p:nvSpPr>
         <p:spPr>
           <a:xfrm>
-            <a:off x="640080" y="6342049"/>
-            <a:ext cx="10972800" cy="411480"/>
+            <a:off x="457200" y="6296329"/>
+            <a:ext cx="11338560" cy="411480"/>
           </a:xfrm>
           <a:prstGeom prst="rect">
             <a:avLst/>
@@ -3776,7 +3279,7 @@
               <a:buNone/>
             </a:pPr>
             <a:r>
-              <a:rPr lang="en-US" sz="1300" i="1" dirty="0">
+              <a:rPr lang="en-US" sz="1250" i="1" dirty="0">
                 <a:solidFill>
                   <a:srgbClr val="64748B"/>
                 </a:solidFill>
@@ -3784,9 +3287,9 @@
                 <a:ea typeface="Calibri" pitchFamily="34" charset="-122"/>
                 <a:cs typeface="Calibri" pitchFamily="34" charset="-120"/>
               </a:rPr>
-              <a:t>Each agent is a fixed pipeline, not an autonomous loop. The LLM is used only where it earns its place; some answers need none.</a:t>
-            </a:r>
-            <a:endParaRPr lang="en-US" sz="1300" dirty="0"/>
+              <a:t>Deterministic where possible (zero-LLM catalogue answers)   ·   trusted-domain search with the answer key deny-listed   ·   one reasoning pass over a fixed evidence bundle</a:t>
+            </a:r>
+            <a:endParaRPr lang="en-US" sz="1250" dirty="0"/>
           </a:p>
         </p:txBody>
       </p:sp>
@@ -3831,7 +3334,7 @@
         <p:spPr>
           <a:xfrm>
             <a:off x="640080" y="411480"/>
-            <a:ext cx="11155680" cy="640080"/>
+            <a:ext cx="11338560" cy="640080"/>
           </a:xfrm>
           <a:prstGeom prst="rect">
             <a:avLst/>
@@ -3855,7 +3358,7 @@
                 <a:ea typeface="Georgia" pitchFamily="34" charset="-122"/>
                 <a:cs typeface="Georgia" pitchFamily="34" charset="-120"/>
               </a:rPr>
-              <a:t>How we evaluate, and what we are still deciding</a:t>
+              <a:t>How the system checks it did not make it up</a:t>
             </a:r>
             <a:endParaRPr lang="en-US" sz="3000" dirty="0"/>
           </a:p>
@@ -3863,305 +3366,18 @@
       </p:sp>
       <p:sp>
         <p:nvSpPr>
-          <p:cNvPr id="3" name="Text 1"/>
-          <p:cNvSpPr/>
-          <p:nvPr/>
-        </p:nvSpPr>
-        <p:spPr>
-          <a:xfrm>
-            <a:off x="640080" y="1280160"/>
-            <a:ext cx="4937760" cy="411480"/>
-          </a:xfrm>
-          <a:prstGeom prst="rect">
-            <a:avLst/>
-          </a:prstGeom>
-          <a:noFill/>
-          <a:ln/>
-        </p:spPr>
-        <p:txBody>
-          <a:bodyPr wrap="square" rtlCol="0" anchor="ctr"/>
-          <a:lstStyle/>
-          <a:p>
-            <a:pPr indent="0" marL="0">
-              <a:buNone/>
-            </a:pPr>
-            <a:r>
-              <a:rPr lang="en-US" sz="1800" b="1" dirty="0">
-                <a:solidFill>
-                  <a:srgbClr val="0E7C86"/>
-                </a:solidFill>
-                <a:latin typeface="Calibri" pitchFamily="34" charset="0"/>
-                <a:ea typeface="Calibri" pitchFamily="34" charset="-122"/>
-                <a:cs typeface="Calibri" pitchFamily="34" charset="-120"/>
-              </a:rPr>
-              <a:t>What we measure</a:t>
-            </a:r>
-            <a:endParaRPr lang="en-US" sz="1800" dirty="0"/>
-          </a:p>
-        </p:txBody>
-      </p:sp>
-      <p:sp>
-        <p:nvSpPr>
-          <p:cNvPr id="4" name="Text 2"/>
-          <p:cNvSpPr/>
-          <p:nvPr/>
-        </p:nvSpPr>
-        <p:spPr>
-          <a:xfrm>
-            <a:off x="640080" y="1737360"/>
-            <a:ext cx="4937760" cy="1828800"/>
-          </a:xfrm>
-          <a:prstGeom prst="rect">
-            <a:avLst/>
-          </a:prstGeom>
-          <a:noFill/>
-          <a:ln/>
-        </p:spPr>
-        <p:txBody>
-          <a:bodyPr wrap="square" rtlCol="0" anchor="ctr"/>
-          <a:lstStyle/>
-          <a:p>
-            <a:pPr marL="342900" indent="-342900">
-              <a:lnSpc>
-                <a:spcPct val="112000"/>
-              </a:lnSpc>
-              <a:spcAft>
-                <a:spcPts val="800"/>
-              </a:spcAft>
-              <a:buSzPct val="100000"/>
-              <a:buChar char="•"/>
-            </a:pPr>
-            <a:r>
-              <a:rPr lang="en-US" sz="1450" dirty="0">
-                <a:solidFill>
-                  <a:srgbClr val="1E293B"/>
-                </a:solidFill>
-                <a:latin typeface="Calibri" pitchFamily="34" charset="0"/>
-                <a:ea typeface="Calibri" pitchFamily="34" charset="-122"/>
-                <a:cs typeface="Calibri" pitchFamily="34" charset="-120"/>
-              </a:rPr>
-              <a:t>Compare each answer to ODMI's published 2025 answers, the ground truth.</a:t>
-            </a:r>
-            <a:endParaRPr lang="en-US" sz="1450" dirty="0"/>
-          </a:p>
-          <a:p>
-            <a:pPr marL="342900" indent="-342900">
-              <a:lnSpc>
-                <a:spcPct val="112000"/>
-              </a:lnSpc>
-              <a:spcAft>
-                <a:spcPts val="800"/>
-              </a:spcAft>
-              <a:buSzPct val="100000"/>
-              <a:buChar char="•"/>
-            </a:pPr>
-            <a:r>
-              <a:rPr lang="en-US" sz="1450" dirty="0">
-                <a:solidFill>
-                  <a:srgbClr val="1E293B"/>
-                </a:solidFill>
-                <a:latin typeface="Calibri" pitchFamily="34" charset="0"/>
-                <a:ea typeface="Calibri" pitchFamily="34" charset="-122"/>
-                <a:cs typeface="Calibri" pitchFamily="34" charset="-120"/>
-              </a:rPr>
-              <a:t>Score every pair: match / differ / abstain.</a:t>
-            </a:r>
-            <a:endParaRPr lang="en-US" sz="1450" dirty="0"/>
-          </a:p>
-          <a:p>
-            <a:pPr marL="342900" indent="-342900">
-              <a:lnSpc>
-                <a:spcPct val="112000"/>
-              </a:lnSpc>
-              <a:spcAft>
-                <a:spcPts val="800"/>
-              </a:spcAft>
-              <a:buSzPct val="100000"/>
-              <a:buChar char="•"/>
-            </a:pPr>
-            <a:r>
-              <a:rPr lang="en-US" sz="1450" dirty="0">
-                <a:solidFill>
-                  <a:srgbClr val="1E293B"/>
-                </a:solidFill>
-                <a:latin typeface="Calibri" pitchFamily="34" charset="0"/>
-                <a:ea typeface="Calibri" pitchFamily="34" charset="-122"/>
-                <a:cs typeface="Calibri" pitchFamily="34" charset="-120"/>
-              </a:rPr>
-              <a:t>Stratify by ODMI dimension (Policy, Portal, Quality, Impact) and by country.</a:t>
-            </a:r>
-            <a:endParaRPr lang="en-US" sz="1450" dirty="0"/>
-          </a:p>
-        </p:txBody>
-      </p:sp>
-      <p:sp>
-        <p:nvSpPr>
-          <p:cNvPr id="5" name="Shape 3"/>
-          <p:cNvSpPr/>
-          <p:nvPr/>
-        </p:nvSpPr>
-        <p:spPr>
-          <a:xfrm>
-            <a:off x="640080" y="3703320"/>
-            <a:ext cx="4937760" cy="1554480"/>
+          <p:cNvPr id="3" name="Shape 1"/>
+          <p:cNvSpPr/>
+          <p:nvPr/>
+        </p:nvSpPr>
+        <p:spPr>
+          <a:xfrm>
+            <a:off x="640080" y="1234440"/>
+            <a:ext cx="10908792" cy="877824"/>
           </a:xfrm>
           <a:prstGeom prst="roundRect">
             <a:avLst>
-              <a:gd name="adj" fmla="val 4118"/>
-            </a:avLst>
-          </a:prstGeom>
-          <a:solidFill>
-            <a:srgbClr val="FFF4E5"/>
-          </a:solidFill>
-          <a:ln w="12700">
-            <a:solidFill>
-              <a:srgbClr val="B45309"/>
-            </a:solidFill>
-            <a:prstDash val="solid"/>
-          </a:ln>
-          <a:effectLst>
-            <a:outerShdw sx="100000" sy="100000" kx="0" ky="0" algn="bl" rotWithShape="0" blurRad="88900" dist="25400" dir="8100000">
-              <a:srgbClr val="0F2A43">
-                <a:alpha val="12000"/>
-              </a:srgbClr>
-            </a:outerShdw>
-          </a:effectLst>
-        </p:spPr>
-      </p:sp>
-      <p:sp>
-        <p:nvSpPr>
-          <p:cNvPr id="6" name="Text 4"/>
-          <p:cNvSpPr/>
-          <p:nvPr/>
-        </p:nvSpPr>
-        <p:spPr>
-          <a:xfrm>
-            <a:off x="868680" y="3840480"/>
-            <a:ext cx="4572000" cy="365760"/>
-          </a:xfrm>
-          <a:prstGeom prst="rect">
-            <a:avLst/>
-          </a:prstGeom>
-          <a:noFill/>
-          <a:ln/>
-        </p:spPr>
-        <p:txBody>
-          <a:bodyPr wrap="square" rtlCol="0" anchor="ctr"/>
-          <a:lstStyle/>
-          <a:p>
-            <a:pPr indent="0" marL="0">
-              <a:buNone/>
-            </a:pPr>
-            <a:r>
-              <a:rPr lang="en-US" sz="1500" b="1" dirty="0">
-                <a:solidFill>
-                  <a:srgbClr val="B45309"/>
-                </a:solidFill>
-                <a:latin typeface="Calibri" pitchFamily="34" charset="0"/>
-                <a:ea typeface="Calibri" pitchFamily="34" charset="-122"/>
-                <a:cs typeface="Calibri" pitchFamily="34" charset="-120"/>
-              </a:rPr>
-              <a:t>The ground truth may be wrong</a:t>
-            </a:r>
-            <a:endParaRPr lang="en-US" sz="1500" dirty="0"/>
-          </a:p>
-        </p:txBody>
-      </p:sp>
-      <p:sp>
-        <p:nvSpPr>
-          <p:cNvPr id="7" name="Text 5"/>
-          <p:cNvSpPr/>
-          <p:nvPr/>
-        </p:nvSpPr>
-        <p:spPr>
-          <a:xfrm>
-            <a:off x="868680" y="4206240"/>
-            <a:ext cx="4572000" cy="914400"/>
-          </a:xfrm>
-          <a:prstGeom prst="rect">
-            <a:avLst/>
-          </a:prstGeom>
-          <a:noFill/>
-          <a:ln/>
-        </p:spPr>
-        <p:txBody>
-          <a:bodyPr wrap="square" rtlCol="0" anchor="ctr"/>
-          <a:lstStyle/>
-          <a:p>
-            <a:pPr indent="0" marL="0">
-              <a:lnSpc>
-                <a:spcPct val="105000"/>
-              </a:lnSpc>
-              <a:buNone/>
-            </a:pPr>
-            <a:r>
-              <a:rPr lang="en-US" sz="1350" dirty="0">
-                <a:solidFill>
-                  <a:srgbClr val="1E293B"/>
-                </a:solidFill>
-                <a:latin typeface="Calibri" pitchFamily="34" charset="0"/>
-                <a:ea typeface="Calibri" pitchFamily="34" charset="-122"/>
-                <a:cs typeface="Calibri" pitchFamily="34" charset="-120"/>
-              </a:rPr>
-              <a:t>A disagreement is not automatically our error. Each one gets a human glance.</a:t>
-            </a:r>
-            <a:endParaRPr lang="en-US" sz="1350" dirty="0"/>
-          </a:p>
-        </p:txBody>
-      </p:sp>
-      <p:sp>
-        <p:nvSpPr>
-          <p:cNvPr id="8" name="Text 6"/>
-          <p:cNvSpPr/>
-          <p:nvPr/>
-        </p:nvSpPr>
-        <p:spPr>
-          <a:xfrm>
-            <a:off x="640080" y="5440680"/>
-            <a:ext cx="4937760" cy="548640"/>
-          </a:xfrm>
-          <a:prstGeom prst="rect">
-            <a:avLst/>
-          </a:prstGeom>
-          <a:noFill/>
-          <a:ln/>
-        </p:spPr>
-        <p:txBody>
-          <a:bodyPr wrap="square" rtlCol="0" anchor="ctr"/>
-          <a:lstStyle/>
-          <a:p>
-            <a:pPr indent="0" marL="0">
-              <a:buNone/>
-            </a:pPr>
-            <a:r>
-              <a:rPr lang="en-US" sz="1300" i="1" dirty="0">
-                <a:solidFill>
-                  <a:srgbClr val="64748B"/>
-                </a:solidFill>
-                <a:latin typeface="Calibri" pitchFamily="34" charset="0"/>
-                <a:ea typeface="Calibri" pitchFamily="34" charset="-122"/>
-                <a:cs typeface="Calibri" pitchFamily="34" charset="-120"/>
-              </a:rPr>
-              <a:t>We stepped back from France after a high false-positive rate.</a:t>
-            </a:r>
-            <a:endParaRPr lang="en-US" sz="1300" dirty="0"/>
-          </a:p>
-        </p:txBody>
-      </p:sp>
-      <p:sp>
-        <p:nvSpPr>
-          <p:cNvPr id="9" name="Shape 7"/>
-          <p:cNvSpPr/>
-          <p:nvPr/>
-        </p:nvSpPr>
-        <p:spPr>
-          <a:xfrm>
-            <a:off x="5897880" y="1234440"/>
-            <a:ext cx="5623560" cy="5074920"/>
-          </a:xfrm>
-          <a:prstGeom prst="roundRect">
-            <a:avLst>
-              <a:gd name="adj" fmla="val 1261"/>
+              <a:gd name="adj" fmla="val 6250"/>
             </a:avLst>
           </a:prstGeom>
           <a:solidFill>
@@ -4184,14 +3400,34 @@
       </p:sp>
       <p:sp>
         <p:nvSpPr>
-          <p:cNvPr id="10" name="Text 8"/>
-          <p:cNvSpPr/>
-          <p:nvPr/>
-        </p:nvSpPr>
-        <p:spPr>
-          <a:xfrm>
-            <a:off x="6172200" y="1417320"/>
-            <a:ext cx="5120640" cy="411480"/>
+          <p:cNvPr id="4" name="Shape 2"/>
+          <p:cNvSpPr/>
+          <p:nvPr/>
+        </p:nvSpPr>
+        <p:spPr>
+          <a:xfrm>
+            <a:off x="914400" y="1444752"/>
+            <a:ext cx="457200" cy="457200"/>
+          </a:xfrm>
+          <a:prstGeom prst="ellipse">
+            <a:avLst/>
+          </a:prstGeom>
+          <a:solidFill>
+            <a:srgbClr val="0E7C86"/>
+          </a:solidFill>
+          <a:ln/>
+        </p:spPr>
+      </p:sp>
+      <p:sp>
+        <p:nvSpPr>
+          <p:cNvPr id="5" name="Text 3"/>
+          <p:cNvSpPr/>
+          <p:nvPr/>
+        </p:nvSpPr>
+        <p:spPr>
+          <a:xfrm>
+            <a:off x="914400" y="1444752"/>
+            <a:ext cx="457200" cy="457200"/>
           </a:xfrm>
           <a:prstGeom prst="rect">
             <a:avLst/>
@@ -4203,34 +3439,34 @@
           <a:bodyPr wrap="square" rtlCol="0" anchor="ctr"/>
           <a:lstStyle/>
           <a:p>
-            <a:pPr indent="0" marL="0">
-              <a:buNone/>
-            </a:pPr>
-            <a:r>
-              <a:rPr lang="en-US" sz="1800" b="1" dirty="0">
-                <a:solidFill>
-                  <a:srgbClr val="0F2A43"/>
+            <a:pPr algn="ctr" indent="0" marL="0">
+              <a:buNone/>
+            </a:pPr>
+            <a:r>
+              <a:rPr lang="en-US" sz="2000" b="1" dirty="0">
+                <a:solidFill>
+                  <a:srgbClr val="FFFFFF"/>
                 </a:solidFill>
                 <a:latin typeface="Calibri" pitchFamily="34" charset="0"/>
                 <a:ea typeface="Calibri" pitchFamily="34" charset="-122"/>
                 <a:cs typeface="Calibri" pitchFamily="34" charset="-120"/>
               </a:rPr>
-              <a:t>Open question: the held-out test</a:t>
-            </a:r>
-            <a:endParaRPr lang="en-US" sz="1800" dirty="0"/>
-          </a:p>
-        </p:txBody>
-      </p:sp>
-      <p:sp>
-        <p:nvSpPr>
-          <p:cNvPr id="11" name="Text 9"/>
-          <p:cNvSpPr/>
-          <p:nvPr/>
-        </p:nvSpPr>
-        <p:spPr>
-          <a:xfrm>
-            <a:off x="6172200" y="1828800"/>
-            <a:ext cx="5074920" cy="640080"/>
+              <a:t>✓</a:t>
+            </a:r>
+            <a:endParaRPr lang="en-US" sz="2000" dirty="0"/>
+          </a:p>
+        </p:txBody>
+      </p:sp>
+      <p:sp>
+        <p:nvSpPr>
+          <p:cNvPr id="6" name="Text 4"/>
+          <p:cNvSpPr/>
+          <p:nvPr/>
+        </p:nvSpPr>
+        <p:spPr>
+          <a:xfrm>
+            <a:off x="1600200" y="1353312"/>
+            <a:ext cx="3383280" cy="640080"/>
           </a:xfrm>
           <a:prstGeom prst="rect">
             <a:avLst/>
@@ -4243,21 +3479,60 @@
           <a:lstStyle/>
           <a:p>
             <a:pPr indent="0" marL="0">
-              <a:lnSpc>
-                <a:spcPct val="105000"/>
-              </a:lnSpc>
-              <a:buNone/>
-            </a:pPr>
-            <a:r>
-              <a:rPr lang="en-US" sz="1300" i="1" dirty="0">
-                <a:solidFill>
-                  <a:srgbClr val="64748B"/>
+              <a:buNone/>
+            </a:pPr>
+            <a:r>
+              <a:rPr lang="en-US" sz="1600" b="1" dirty="0">
+                <a:solidFill>
+                  <a:srgbClr val="0E7C86"/>
                 </a:solidFill>
                 <a:latin typeface="Calibri" pitchFamily="34" charset="0"/>
                 <a:ea typeface="Calibri" pitchFamily="34" charset="-122"/>
                 <a:cs typeface="Calibri" pitchFamily="34" charset="-120"/>
               </a:rPr>
-              <a:t>If we tune on the answers we score on, we leak. We need a held-out test, not just validation.</a:t>
+              <a:t>Grounded in what it read</a:t>
+            </a:r>
+            <a:endParaRPr lang="en-US" sz="1600" dirty="0"/>
+          </a:p>
+        </p:txBody>
+      </p:sp>
+      <p:sp>
+        <p:nvSpPr>
+          <p:cNvPr id="7" name="Text 5"/>
+          <p:cNvSpPr/>
+          <p:nvPr/>
+        </p:nvSpPr>
+        <p:spPr>
+          <a:xfrm>
+            <a:off x="5074920" y="1325880"/>
+            <a:ext cx="6245352" cy="713232"/>
+          </a:xfrm>
+          <a:prstGeom prst="rect">
+            <a:avLst/>
+          </a:prstGeom>
+          <a:noFill/>
+          <a:ln/>
+        </p:spPr>
+        <p:txBody>
+          <a:bodyPr wrap="square" rtlCol="0" anchor="ctr"/>
+          <a:lstStyle/>
+          <a:p>
+            <a:pPr indent="0" marL="0">
+              <a:lnSpc>
+                <a:spcPct val="100000"/>
+              </a:lnSpc>
+              <a:buNone/>
+            </a:pPr>
+            <a:r>
+              <a:rPr lang="en-US" sz="1300" dirty="0">
+                <a:solidFill>
+                  <a:srgbClr val="1E293B"/>
+                </a:solidFill>
+                <a:latin typeface="Calibri" pitchFamily="34" charset="0"/>
+                <a:ea typeface="Calibri" pitchFamily="34" charset="-122"/>
+                <a:cs typeface="Calibri" pitchFamily="34" charset="-120"/>
+              </a:rPr>
+              <a:t>The cited source must be one the Researcher actually retrieved; the evidence quote is checked against those snippets. It cannot cite what it never saw.</a:t>
             </a:r>
             <a:endParaRPr lang="en-US" sz="1300" dirty="0"/>
           </a:p>
@@ -4265,22 +3540,22 @@
       </p:sp>
       <p:sp>
         <p:nvSpPr>
-          <p:cNvPr id="12" name="Shape 10"/>
-          <p:cNvSpPr/>
-          <p:nvPr/>
-        </p:nvSpPr>
-        <p:spPr>
-          <a:xfrm>
-            <a:off x="6172200" y="2514600"/>
-            <a:ext cx="5074920" cy="1078992"/>
+          <p:cNvPr id="8" name="Shape 6"/>
+          <p:cNvSpPr/>
+          <p:nvPr/>
+        </p:nvSpPr>
+        <p:spPr>
+          <a:xfrm>
+            <a:off x="640080" y="2176272"/>
+            <a:ext cx="10908792" cy="877824"/>
           </a:xfrm>
           <a:prstGeom prst="roundRect">
             <a:avLst>
-              <a:gd name="adj" fmla="val 5932"/>
+              <a:gd name="adj" fmla="val 6250"/>
             </a:avLst>
           </a:prstGeom>
           <a:solidFill>
-            <a:srgbClr val="FFFFFF"/>
+            <a:srgbClr val="F1F5F9"/>
           </a:solidFill>
           <a:ln w="12700">
             <a:solidFill>
@@ -4299,14 +3574,34 @@
       </p:sp>
       <p:sp>
         <p:nvSpPr>
-          <p:cNvPr id="13" name="Text 11"/>
-          <p:cNvSpPr/>
-          <p:nvPr/>
-        </p:nvSpPr>
-        <p:spPr>
-          <a:xfrm>
-            <a:off x="6400800" y="2642616"/>
-            <a:ext cx="4617720" cy="365760"/>
+          <p:cNvPr id="9" name="Shape 7"/>
+          <p:cNvSpPr/>
+          <p:nvPr/>
+        </p:nvSpPr>
+        <p:spPr>
+          <a:xfrm>
+            <a:off x="914400" y="2386584"/>
+            <a:ext cx="457200" cy="457200"/>
+          </a:xfrm>
+          <a:prstGeom prst="ellipse">
+            <a:avLst/>
+          </a:prstGeom>
+          <a:solidFill>
+            <a:srgbClr val="0E7C86"/>
+          </a:solidFill>
+          <a:ln/>
+        </p:spPr>
+      </p:sp>
+      <p:sp>
+        <p:nvSpPr>
+          <p:cNvPr id="10" name="Text 8"/>
+          <p:cNvSpPr/>
+          <p:nvPr/>
+        </p:nvSpPr>
+        <p:spPr>
+          <a:xfrm>
+            <a:off x="914400" y="2386584"/>
+            <a:ext cx="457200" cy="457200"/>
           </a:xfrm>
           <a:prstGeom prst="rect">
             <a:avLst/>
@@ -4318,34 +3613,73 @@
           <a:bodyPr wrap="square" rtlCol="0" anchor="ctr"/>
           <a:lstStyle/>
           <a:p>
-            <a:pPr indent="0" marL="0">
-              <a:buNone/>
-            </a:pPr>
-            <a:r>
-              <a:rPr lang="en-US" sz="1450" b="1" dirty="0">
-                <a:solidFill>
-                  <a:srgbClr val="0E7C86"/>
+            <a:pPr algn="ctr" indent="0" marL="0">
+              <a:buNone/>
+            </a:pPr>
+            <a:r>
+              <a:rPr lang="en-US" sz="2000" b="1" dirty="0">
+                <a:solidFill>
+                  <a:srgbClr val="FFFFFF"/>
                 </a:solidFill>
                 <a:latin typeface="Calibri" pitchFamily="34" charset="0"/>
                 <a:ea typeface="Calibri" pitchFamily="34" charset="-122"/>
                 <a:cs typeface="Calibri" pitchFamily="34" charset="-120"/>
               </a:rPr>
-              <a:t>Hold out by country</a:t>
-            </a:r>
-            <a:endParaRPr lang="en-US" sz="1450" dirty="0"/>
-          </a:p>
-        </p:txBody>
-      </p:sp>
-      <p:sp>
-        <p:nvSpPr>
-          <p:cNvPr id="14" name="Text 12"/>
-          <p:cNvSpPr/>
-          <p:nvPr/>
-        </p:nvSpPr>
-        <p:spPr>
-          <a:xfrm>
-            <a:off x="6400800" y="2990088"/>
-            <a:ext cx="4617720" cy="548640"/>
+              <a:t>✓</a:t>
+            </a:r>
+            <a:endParaRPr lang="en-US" sz="2000" dirty="0"/>
+          </a:p>
+        </p:txBody>
+      </p:sp>
+      <p:sp>
+        <p:nvSpPr>
+          <p:cNvPr id="11" name="Text 9"/>
+          <p:cNvSpPr/>
+          <p:nvPr/>
+        </p:nvSpPr>
+        <p:spPr>
+          <a:xfrm>
+            <a:off x="1600200" y="2295144"/>
+            <a:ext cx="3383280" cy="640080"/>
+          </a:xfrm>
+          <a:prstGeom prst="rect">
+            <a:avLst/>
+          </a:prstGeom>
+          <a:noFill/>
+          <a:ln/>
+        </p:spPr>
+        <p:txBody>
+          <a:bodyPr wrap="square" rtlCol="0" anchor="ctr"/>
+          <a:lstStyle/>
+          <a:p>
+            <a:pPr indent="0" marL="0">
+              <a:buNone/>
+            </a:pPr>
+            <a:r>
+              <a:rPr lang="en-US" sz="1600" b="1" dirty="0">
+                <a:solidFill>
+                  <a:srgbClr val="0E7C86"/>
+                </a:solidFill>
+                <a:latin typeface="Calibri" pitchFamily="34" charset="0"/>
+                <a:ea typeface="Calibri" pitchFamily="34" charset="-122"/>
+                <a:cs typeface="Calibri" pitchFamily="34" charset="-120"/>
+              </a:rPr>
+              <a:t>The source must be real</a:t>
+            </a:r>
+            <a:endParaRPr lang="en-US" sz="1600" dirty="0"/>
+          </a:p>
+        </p:txBody>
+      </p:sp>
+      <p:sp>
+        <p:nvSpPr>
+          <p:cNvPr id="12" name="Text 10"/>
+          <p:cNvSpPr/>
+          <p:nvPr/>
+        </p:nvSpPr>
+        <p:spPr>
+          <a:xfrm>
+            <a:off x="5074920" y="2267712"/>
+            <a:ext cx="6245352" cy="713232"/>
           </a:xfrm>
           <a:prstGeom prst="rect">
             <a:avLst/>
@@ -4364,7 +3698,7 @@
               <a:buNone/>
             </a:pPr>
             <a:r>
-              <a:rPr lang="en-US" sz="1250" dirty="0">
+              <a:rPr lang="en-US" sz="1300" dirty="0">
                 <a:solidFill>
                   <a:srgbClr val="1E293B"/>
                 </a:solidFill>
@@ -4372,30 +3706,30 @@
                 <a:ea typeface="Calibri" pitchFamily="34" charset="-122"/>
                 <a:cs typeface="Calibri" pitchFamily="34" charset="-120"/>
               </a:rPr>
-              <a:t>Malta (English isolates reasoning) + NL (tests the multilingual path), unseen during development.</a:t>
-            </a:r>
-            <a:endParaRPr lang="en-US" sz="1250" dirty="0"/>
-          </a:p>
-        </p:txBody>
-      </p:sp>
-      <p:sp>
-        <p:nvSpPr>
-          <p:cNvPr id="15" name="Shape 13"/>
-          <p:cNvSpPr/>
-          <p:nvPr/>
-        </p:nvSpPr>
-        <p:spPr>
-          <a:xfrm>
-            <a:off x="6172200" y="3739896"/>
-            <a:ext cx="5074920" cy="1078992"/>
+              <a:t>URL is live (HEAD request), on a trusted domain, and the answer fits the allowed shape for that question.</a:t>
+            </a:r>
+            <a:endParaRPr lang="en-US" sz="1300" dirty="0"/>
+          </a:p>
+        </p:txBody>
+      </p:sp>
+      <p:sp>
+        <p:nvSpPr>
+          <p:cNvPr id="13" name="Shape 11"/>
+          <p:cNvSpPr/>
+          <p:nvPr/>
+        </p:nvSpPr>
+        <p:spPr>
+          <a:xfrm>
+            <a:off x="640080" y="3118104"/>
+            <a:ext cx="10908792" cy="877824"/>
           </a:xfrm>
           <a:prstGeom prst="roundRect">
             <a:avLst>
-              <a:gd name="adj" fmla="val 5932"/>
+              <a:gd name="adj" fmla="val 6250"/>
             </a:avLst>
           </a:prstGeom>
           <a:solidFill>
-            <a:srgbClr val="FFFFFF"/>
+            <a:srgbClr val="F1F5F9"/>
           </a:solidFill>
           <a:ln w="12700">
             <a:solidFill>
@@ -4414,14 +3748,34 @@
       </p:sp>
       <p:sp>
         <p:nvSpPr>
-          <p:cNvPr id="16" name="Text 14"/>
-          <p:cNvSpPr/>
-          <p:nvPr/>
-        </p:nvSpPr>
-        <p:spPr>
-          <a:xfrm>
-            <a:off x="6400800" y="3867912"/>
-            <a:ext cx="4617720" cy="365760"/>
+          <p:cNvPr id="14" name="Shape 12"/>
+          <p:cNvSpPr/>
+          <p:nvPr/>
+        </p:nvSpPr>
+        <p:spPr>
+          <a:xfrm>
+            <a:off x="914400" y="3328416"/>
+            <a:ext cx="457200" cy="457200"/>
+          </a:xfrm>
+          <a:prstGeom prst="ellipse">
+            <a:avLst/>
+          </a:prstGeom>
+          <a:solidFill>
+            <a:srgbClr val="0E7C86"/>
+          </a:solidFill>
+          <a:ln/>
+        </p:spPr>
+      </p:sp>
+      <p:sp>
+        <p:nvSpPr>
+          <p:cNvPr id="15" name="Text 13"/>
+          <p:cNvSpPr/>
+          <p:nvPr/>
+        </p:nvSpPr>
+        <p:spPr>
+          <a:xfrm>
+            <a:off x="914400" y="3328416"/>
+            <a:ext cx="457200" cy="457200"/>
           </a:xfrm>
           <a:prstGeom prst="rect">
             <a:avLst/>
@@ -4433,21 +3787,60 @@
           <a:bodyPr wrap="square" rtlCol="0" anchor="ctr"/>
           <a:lstStyle/>
           <a:p>
-            <a:pPr indent="0" marL="0">
-              <a:buNone/>
-            </a:pPr>
-            <a:r>
-              <a:rPr lang="en-US" sz="1450" b="1" dirty="0">
-                <a:solidFill>
-                  <a:srgbClr val="0E7C86"/>
+            <a:pPr algn="ctr" indent="0" marL="0">
+              <a:buNone/>
+            </a:pPr>
+            <a:r>
+              <a:rPr lang="en-US" sz="2000" b="1" dirty="0">
+                <a:solidFill>
+                  <a:srgbClr val="FFFFFF"/>
                 </a:solidFill>
                 <a:latin typeface="Calibri" pitchFamily="34" charset="0"/>
                 <a:ea typeface="Calibri" pitchFamily="34" charset="-122"/>
                 <a:cs typeface="Calibri" pitchFamily="34" charset="-120"/>
               </a:rPr>
-              <a:t>Hold out by question</a:t>
-            </a:r>
-            <a:endParaRPr lang="en-US" sz="1450" dirty="0"/>
+              <a:t>✓</a:t>
+            </a:r>
+            <a:endParaRPr lang="en-US" sz="2000" dirty="0"/>
+          </a:p>
+        </p:txBody>
+      </p:sp>
+      <p:sp>
+        <p:nvSpPr>
+          <p:cNvPr id="16" name="Text 14"/>
+          <p:cNvSpPr/>
+          <p:nvPr/>
+        </p:nvSpPr>
+        <p:spPr>
+          <a:xfrm>
+            <a:off x="1600200" y="3236976"/>
+            <a:ext cx="3383280" cy="640080"/>
+          </a:xfrm>
+          <a:prstGeom prst="rect">
+            <a:avLst/>
+          </a:prstGeom>
+          <a:noFill/>
+          <a:ln/>
+        </p:spPr>
+        <p:txBody>
+          <a:bodyPr wrap="square" rtlCol="0" anchor="ctr"/>
+          <a:lstStyle/>
+          <a:p>
+            <a:pPr indent="0" marL="0">
+              <a:buNone/>
+            </a:pPr>
+            <a:r>
+              <a:rPr lang="en-US" sz="1600" b="1" dirty="0">
+                <a:solidFill>
+                  <a:srgbClr val="0E7C86"/>
+                </a:solidFill>
+                <a:latin typeface="Calibri" pitchFamily="34" charset="0"/>
+                <a:ea typeface="Calibri" pitchFamily="34" charset="-122"/>
+                <a:cs typeface="Calibri" pitchFamily="34" charset="-120"/>
+              </a:rPr>
+              <a:t>An adversary checks the claim</a:t>
+            </a:r>
+            <a:endParaRPr lang="en-US" sz="1600" dirty="0"/>
           </a:p>
         </p:txBody>
       </p:sp>
@@ -4459,8 +3852,8 @@
         </p:nvSpPr>
         <p:spPr>
           <a:xfrm>
-            <a:off x="6400800" y="4215384"/>
-            <a:ext cx="4617720" cy="548640"/>
+            <a:off x="5074920" y="3209544"/>
+            <a:ext cx="6245352" cy="713232"/>
           </a:xfrm>
           <a:prstGeom prst="rect">
             <a:avLst/>
@@ -4479,7 +3872,7 @@
               <a:buNone/>
             </a:pPr>
             <a:r>
-              <a:rPr lang="en-US" sz="1250" dirty="0">
+              <a:rPr lang="en-US" sz="1300" dirty="0">
                 <a:solidFill>
                   <a:srgbClr val="1E293B"/>
                 </a:solidFill>
@@ -4487,9 +3880,9 @@
                 <a:ea typeface="Calibri" pitchFamily="34" charset="-122"/>
                 <a:cs typeface="Calibri" pitchFamily="34" charset="-120"/>
               </a:rPr>
-              <a:t>One country, e.g. France: develop on half the questions, test on the other half.</a:t>
-            </a:r>
-            <a:endParaRPr lang="en-US" sz="1250" dirty="0"/>
+              <a:t>A second agent, the Verifier, is set against the evidence to disprove the answer before it is allowed to stand.</a:t>
+            </a:r>
+            <a:endParaRPr lang="en-US" sz="1300" dirty="0"/>
           </a:p>
         </p:txBody>
       </p:sp>
@@ -4501,16 +3894,16 @@
         </p:nvSpPr>
         <p:spPr>
           <a:xfrm>
-            <a:off x="6172200" y="4965192"/>
-            <a:ext cx="5074920" cy="1078992"/>
+            <a:off x="640080" y="4059936"/>
+            <a:ext cx="10908792" cy="877824"/>
           </a:xfrm>
           <a:prstGeom prst="roundRect">
             <a:avLst>
-              <a:gd name="adj" fmla="val 5932"/>
+              <a:gd name="adj" fmla="val 6250"/>
             </a:avLst>
           </a:prstGeom>
           <a:solidFill>
-            <a:srgbClr val="FFFFFF"/>
+            <a:srgbClr val="F1F5F9"/>
           </a:solidFill>
           <a:ln w="12700">
             <a:solidFill>
@@ -4529,14 +3922,34 @@
       </p:sp>
       <p:sp>
         <p:nvSpPr>
-          <p:cNvPr id="19" name="Text 17"/>
-          <p:cNvSpPr/>
-          <p:nvPr/>
-        </p:nvSpPr>
-        <p:spPr>
-          <a:xfrm>
-            <a:off x="6400800" y="5093208"/>
-            <a:ext cx="4617720" cy="365760"/>
+          <p:cNvPr id="19" name="Shape 17"/>
+          <p:cNvSpPr/>
+          <p:nvPr/>
+        </p:nvSpPr>
+        <p:spPr>
+          <a:xfrm>
+            <a:off x="914400" y="4270248"/>
+            <a:ext cx="457200" cy="457200"/>
+          </a:xfrm>
+          <a:prstGeom prst="ellipse">
+            <a:avLst/>
+          </a:prstGeom>
+          <a:solidFill>
+            <a:srgbClr val="0E7C86"/>
+          </a:solidFill>
+          <a:ln/>
+        </p:spPr>
+      </p:sp>
+      <p:sp>
+        <p:nvSpPr>
+          <p:cNvPr id="20" name="Text 18"/>
+          <p:cNvSpPr/>
+          <p:nvPr/>
+        </p:nvSpPr>
+        <p:spPr>
+          <a:xfrm>
+            <a:off x="914400" y="4270248"/>
+            <a:ext cx="457200" cy="457200"/>
           </a:xfrm>
           <a:prstGeom prst="rect">
             <a:avLst/>
@@ -4548,34 +3961,73 @@
           <a:bodyPr wrap="square" rtlCol="0" anchor="ctr"/>
           <a:lstStyle/>
           <a:p>
-            <a:pPr indent="0" marL="0">
-              <a:buNone/>
-            </a:pPr>
-            <a:r>
-              <a:rPr lang="en-US" sz="1450" b="1" dirty="0">
-                <a:solidFill>
-                  <a:srgbClr val="0E7C86"/>
+            <a:pPr algn="ctr" indent="0" marL="0">
+              <a:buNone/>
+            </a:pPr>
+            <a:r>
+              <a:rPr lang="en-US" sz="2000" b="1" dirty="0">
+                <a:solidFill>
+                  <a:srgbClr val="FFFFFF"/>
                 </a:solidFill>
                 <a:latin typeface="Calibri" pitchFamily="34" charset="0"/>
                 <a:ea typeface="Calibri" pitchFamily="34" charset="-122"/>
                 <a:cs typeface="Calibri" pitchFamily="34" charset="-120"/>
               </a:rPr>
-              <a:t>Similar-country leave-one-out</a:t>
-            </a:r>
-            <a:endParaRPr lang="en-US" sz="1450" dirty="0"/>
-          </a:p>
-        </p:txBody>
-      </p:sp>
-      <p:sp>
-        <p:nvSpPr>
-          <p:cNvPr id="20" name="Text 18"/>
-          <p:cNvSpPr/>
-          <p:nvPr/>
-        </p:nvSpPr>
-        <p:spPr>
-          <a:xfrm>
-            <a:off x="6400800" y="5440680"/>
-            <a:ext cx="4617720" cy="548640"/>
+              <a:t>✓</a:t>
+            </a:r>
+            <a:endParaRPr lang="en-US" sz="2000" dirty="0"/>
+          </a:p>
+        </p:txBody>
+      </p:sp>
+      <p:sp>
+        <p:nvSpPr>
+          <p:cNvPr id="21" name="Text 19"/>
+          <p:cNvSpPr/>
+          <p:nvPr/>
+        </p:nvSpPr>
+        <p:spPr>
+          <a:xfrm>
+            <a:off x="1600200" y="4178808"/>
+            <a:ext cx="3383280" cy="640080"/>
+          </a:xfrm>
+          <a:prstGeom prst="rect">
+            <a:avLst/>
+          </a:prstGeom>
+          <a:noFill/>
+          <a:ln/>
+        </p:spPr>
+        <p:txBody>
+          <a:bodyPr wrap="square" rtlCol="0" anchor="ctr"/>
+          <a:lstStyle/>
+          <a:p>
+            <a:pPr indent="0" marL="0">
+              <a:buNone/>
+            </a:pPr>
+            <a:r>
+              <a:rPr lang="en-US" sz="1600" b="1" dirty="0">
+                <a:solidFill>
+                  <a:srgbClr val="0E7C86"/>
+                </a:solidFill>
+                <a:latin typeface="Calibri" pitchFamily="34" charset="0"/>
+                <a:ea typeface="Calibri" pitchFamily="34" charset="-122"/>
+                <a:cs typeface="Calibri" pitchFamily="34" charset="-120"/>
+              </a:rPr>
+              <a:t>Abstain over guess</a:t>
+            </a:r>
+            <a:endParaRPr lang="en-US" sz="1600" dirty="0"/>
+          </a:p>
+        </p:txBody>
+      </p:sp>
+      <p:sp>
+        <p:nvSpPr>
+          <p:cNvPr id="22" name="Text 20"/>
+          <p:cNvSpPr/>
+          <p:nvPr/>
+        </p:nvSpPr>
+        <p:spPr>
+          <a:xfrm>
+            <a:off x="5074920" y="4151376"/>
+            <a:ext cx="6245352" cy="713232"/>
           </a:xfrm>
           <a:prstGeom prst="rect">
             <a:avLst/>
@@ -4594,7 +4046,7 @@
               <a:buNone/>
             </a:pPr>
             <a:r>
-              <a:rPr lang="en-US" sz="1250" dirty="0">
+              <a:rPr lang="en-US" sz="1300" dirty="0">
                 <a:solidFill>
                   <a:srgbClr val="1E293B"/>
                 </a:solidFill>
@@ -4602,9 +4054,183 @@
                 <a:ea typeface="Calibri" pitchFamily="34" charset="-122"/>
                 <a:cs typeface="Calibri" pitchFamily="34" charset="-120"/>
               </a:rPr>
-              <a:t>Pair countries by profile; develop on one, test the held-out twin.</a:t>
-            </a:r>
-            <a:endParaRPr lang="en-US" sz="1250" dirty="0"/>
+              <a:t>Below a 0.65 confidence floor the system returns an honest "inconclusive" instead of committing to an answer.</a:t>
+            </a:r>
+            <a:endParaRPr lang="en-US" sz="1300" dirty="0"/>
+          </a:p>
+        </p:txBody>
+      </p:sp>
+      <p:sp>
+        <p:nvSpPr>
+          <p:cNvPr id="23" name="Shape 21"/>
+          <p:cNvSpPr/>
+          <p:nvPr/>
+        </p:nvSpPr>
+        <p:spPr>
+          <a:xfrm>
+            <a:off x="640080" y="5001768"/>
+            <a:ext cx="10908792" cy="877824"/>
+          </a:xfrm>
+          <a:prstGeom prst="roundRect">
+            <a:avLst>
+              <a:gd name="adj" fmla="val 6250"/>
+            </a:avLst>
+          </a:prstGeom>
+          <a:solidFill>
+            <a:srgbClr val="F1F5F9"/>
+          </a:solidFill>
+          <a:ln w="12700">
+            <a:solidFill>
+              <a:srgbClr val="CBD5E1"/>
+            </a:solidFill>
+            <a:prstDash val="solid"/>
+          </a:ln>
+          <a:effectLst>
+            <a:outerShdw sx="100000" sy="100000" kx="0" ky="0" algn="bl" rotWithShape="0" blurRad="88900" dist="25400" dir="8100000">
+              <a:srgbClr val="0F2A43">
+                <a:alpha val="12000"/>
+              </a:srgbClr>
+            </a:outerShdw>
+          </a:effectLst>
+        </p:spPr>
+      </p:sp>
+      <p:sp>
+        <p:nvSpPr>
+          <p:cNvPr id="24" name="Shape 22"/>
+          <p:cNvSpPr/>
+          <p:nvPr/>
+        </p:nvSpPr>
+        <p:spPr>
+          <a:xfrm>
+            <a:off x="914400" y="5212080"/>
+            <a:ext cx="457200" cy="457200"/>
+          </a:xfrm>
+          <a:prstGeom prst="ellipse">
+            <a:avLst/>
+          </a:prstGeom>
+          <a:solidFill>
+            <a:srgbClr val="0E7C86"/>
+          </a:solidFill>
+          <a:ln/>
+        </p:spPr>
+      </p:sp>
+      <p:sp>
+        <p:nvSpPr>
+          <p:cNvPr id="25" name="Text 23"/>
+          <p:cNvSpPr/>
+          <p:nvPr/>
+        </p:nvSpPr>
+        <p:spPr>
+          <a:xfrm>
+            <a:off x="914400" y="5212080"/>
+            <a:ext cx="457200" cy="457200"/>
+          </a:xfrm>
+          <a:prstGeom prst="rect">
+            <a:avLst/>
+          </a:prstGeom>
+          <a:noFill/>
+          <a:ln/>
+        </p:spPr>
+        <p:txBody>
+          <a:bodyPr wrap="square" rtlCol="0" anchor="ctr"/>
+          <a:lstStyle/>
+          <a:p>
+            <a:pPr algn="ctr" indent="0" marL="0">
+              <a:buNone/>
+            </a:pPr>
+            <a:r>
+              <a:rPr lang="en-US" sz="2000" b="1" dirty="0">
+                <a:solidFill>
+                  <a:srgbClr val="FFFFFF"/>
+                </a:solidFill>
+                <a:latin typeface="Calibri" pitchFamily="34" charset="0"/>
+                <a:ea typeface="Calibri" pitchFamily="34" charset="-122"/>
+                <a:cs typeface="Calibri" pitchFamily="34" charset="-120"/>
+              </a:rPr>
+              <a:t>✓</a:t>
+            </a:r>
+            <a:endParaRPr lang="en-US" sz="2000" dirty="0"/>
+          </a:p>
+        </p:txBody>
+      </p:sp>
+      <p:sp>
+        <p:nvSpPr>
+          <p:cNvPr id="26" name="Text 24"/>
+          <p:cNvSpPr/>
+          <p:nvPr/>
+        </p:nvSpPr>
+        <p:spPr>
+          <a:xfrm>
+            <a:off x="1600200" y="5120640"/>
+            <a:ext cx="3383280" cy="640080"/>
+          </a:xfrm>
+          <a:prstGeom prst="rect">
+            <a:avLst/>
+          </a:prstGeom>
+          <a:noFill/>
+          <a:ln/>
+        </p:spPr>
+        <p:txBody>
+          <a:bodyPr wrap="square" rtlCol="0" anchor="ctr"/>
+          <a:lstStyle/>
+          <a:p>
+            <a:pPr indent="0" marL="0">
+              <a:buNone/>
+            </a:pPr>
+            <a:r>
+              <a:rPr lang="en-US" sz="1600" b="1" dirty="0">
+                <a:solidFill>
+                  <a:srgbClr val="0E7C86"/>
+                </a:solidFill>
+                <a:latin typeface="Calibri" pitchFamily="34" charset="0"/>
+                <a:ea typeface="Calibri" pitchFamily="34" charset="-122"/>
+                <a:cs typeface="Calibri" pitchFamily="34" charset="-120"/>
+              </a:rPr>
+              <a:t>Retry before giving up</a:t>
+            </a:r>
+            <a:endParaRPr lang="en-US" sz="1600" dirty="0"/>
+          </a:p>
+        </p:txBody>
+      </p:sp>
+      <p:sp>
+        <p:nvSpPr>
+          <p:cNvPr id="27" name="Text 25"/>
+          <p:cNvSpPr/>
+          <p:nvPr/>
+        </p:nvSpPr>
+        <p:spPr>
+          <a:xfrm>
+            <a:off x="5074920" y="5093208"/>
+            <a:ext cx="6245352" cy="713232"/>
+          </a:xfrm>
+          <a:prstGeom prst="rect">
+            <a:avLst/>
+          </a:prstGeom>
+          <a:noFill/>
+          <a:ln/>
+        </p:spPr>
+        <p:txBody>
+          <a:bodyPr wrap="square" rtlCol="0" anchor="ctr"/>
+          <a:lstStyle/>
+          <a:p>
+            <a:pPr indent="0" marL="0">
+              <a:lnSpc>
+                <a:spcPct val="100000"/>
+              </a:lnSpc>
+              <a:buNone/>
+            </a:pPr>
+            <a:r>
+              <a:rPr lang="en-US" sz="1300" dirty="0">
+                <a:solidFill>
+                  <a:srgbClr val="1E293B"/>
+                </a:solidFill>
+                <a:latin typeface="Calibri" pitchFamily="34" charset="0"/>
+                <a:ea typeface="Calibri" pitchFamily="34" charset="-122"/>
+                <a:cs typeface="Calibri" pitchFamily="34" charset="-120"/>
+              </a:rPr>
+              <a:t>A weak first pass triggers retries with forced diverging queries, then abstention if it is still unsure.</a:t>
+            </a:r>
+            <a:endParaRPr lang="en-US" sz="1300" dirty="0"/>
           </a:p>
         </p:txBody>
       </p:sp>
@@ -4648,8 +4274,8 @@
         </p:nvSpPr>
         <p:spPr>
           <a:xfrm>
-            <a:off x="640080" y="365760"/>
-            <a:ext cx="7315200" cy="640080"/>
+            <a:off x="640080" y="411480"/>
+            <a:ext cx="11338560" cy="640080"/>
           </a:xfrm>
           <a:prstGeom prst="rect">
             <a:avLst/>
@@ -4665,7 +4291,7 @@
               <a:buNone/>
             </a:pPr>
             <a:r>
-              <a:rPr lang="en-US" sz="3200" b="1" dirty="0">
+              <a:rPr lang="en-US" sz="3000" b="1" dirty="0">
                 <a:solidFill>
                   <a:srgbClr val="0F2A43"/>
                 </a:solidFill>
@@ -4673,65 +4299,26 @@
                 <a:ea typeface="Georgia" pitchFamily="34" charset="-122"/>
                 <a:cs typeface="Georgia" pitchFamily="34" charset="-120"/>
               </a:rPr>
-              <a:t>Early results</a:t>
-            </a:r>
-            <a:endParaRPr lang="en-US" sz="3200" dirty="0"/>
-          </a:p>
-        </p:txBody>
-      </p:sp>
-      <p:sp>
-        <p:nvSpPr>
-          <p:cNvPr id="3" name="Text 1"/>
-          <p:cNvSpPr/>
-          <p:nvPr/>
-        </p:nvSpPr>
-        <p:spPr>
-          <a:xfrm>
-            <a:off x="640080" y="960120"/>
-            <a:ext cx="10972800" cy="365760"/>
-          </a:xfrm>
-          <a:prstGeom prst="rect">
-            <a:avLst/>
-          </a:prstGeom>
-          <a:noFill/>
-          <a:ln/>
-        </p:spPr>
-        <p:txBody>
-          <a:bodyPr wrap="square" rtlCol="0" anchor="ctr"/>
-          <a:lstStyle/>
-          <a:p>
-            <a:pPr indent="0" marL="0">
-              <a:buNone/>
-            </a:pPr>
-            <a:r>
-              <a:rPr lang="en-US" sz="1300" i="1" dirty="0">
-                <a:solidFill>
-                  <a:srgbClr val="64748B"/>
-                </a:solidFill>
-                <a:latin typeface="Calibri" pitchFamily="34" charset="0"/>
-                <a:ea typeface="Calibri" pitchFamily="34" charset="-122"/>
-                <a:cs typeface="Calibri" pitchFamily="34" charset="-120"/>
-              </a:rPr>
-              <a:t>222 finalised pairs across 6 countries. Numbers still growing since moving off France.</a:t>
-            </a:r>
-            <a:endParaRPr lang="en-US" sz="1300" dirty="0"/>
-          </a:p>
-        </p:txBody>
-      </p:sp>
-      <p:sp>
-        <p:nvSpPr>
-          <p:cNvPr id="4" name="Shape 2"/>
-          <p:cNvSpPr/>
-          <p:nvPr/>
-        </p:nvSpPr>
-        <p:spPr>
-          <a:xfrm>
-            <a:off x="640080" y="1417320"/>
-            <a:ext cx="5394960" cy="1508760"/>
+              <a:t>Measuring it honestly: the accuracy trap</a:t>
+            </a:r>
+            <a:endParaRPr lang="en-US" sz="3000" dirty="0"/>
+          </a:p>
+        </p:txBody>
+      </p:sp>
+      <p:sp>
+        <p:nvSpPr>
+          <p:cNvPr id="3" name="Shape 1"/>
+          <p:cNvSpPr/>
+          <p:nvPr/>
+        </p:nvSpPr>
+        <p:spPr>
+          <a:xfrm>
+            <a:off x="640080" y="1280160"/>
+            <a:ext cx="5349240" cy="4937760"/>
           </a:xfrm>
           <a:prstGeom prst="roundRect">
             <a:avLst>
-              <a:gd name="adj" fmla="val 4242"/>
+              <a:gd name="adj" fmla="val 1111"/>
             </a:avLst>
           </a:prstGeom>
           <a:solidFill>
@@ -4754,14 +4341,53 @@
       </p:sp>
       <p:sp>
         <p:nvSpPr>
+          <p:cNvPr id="4" name="Text 2"/>
+          <p:cNvSpPr/>
+          <p:nvPr/>
+        </p:nvSpPr>
+        <p:spPr>
+          <a:xfrm>
+            <a:off x="914400" y="1508760"/>
+            <a:ext cx="8229600" cy="292608"/>
+          </a:xfrm>
+          <a:prstGeom prst="rect">
+            <a:avLst/>
+          </a:prstGeom>
+          <a:noFill/>
+          <a:ln/>
+        </p:spPr>
+        <p:txBody>
+          <a:bodyPr wrap="square" rtlCol="0" anchor="ctr"/>
+          <a:lstStyle/>
+          <a:p>
+            <a:pPr indent="0" marL="0">
+              <a:buNone/>
+            </a:pPr>
+            <a:r>
+              <a:rPr lang="en-US" sz="1250" b="1" spc="200" kern="0" dirty="0">
+                <a:solidFill>
+                  <a:srgbClr val="B45309"/>
+                </a:solidFill>
+                <a:latin typeface="Calibri" pitchFamily="34" charset="0"/>
+                <a:ea typeface="Calibri" pitchFamily="34" charset="-122"/>
+                <a:cs typeface="Calibri" pitchFamily="34" charset="-120"/>
+              </a:rPr>
+              <a:t>THE TRAP</a:t>
+            </a:r>
+            <a:endParaRPr lang="en-US" sz="1250" dirty="0"/>
+          </a:p>
+        </p:txBody>
+      </p:sp>
+      <p:sp>
+        <p:nvSpPr>
           <p:cNvPr id="5" name="Text 3"/>
           <p:cNvSpPr/>
           <p:nvPr/>
         </p:nvSpPr>
         <p:spPr>
           <a:xfrm>
-            <a:off x="868680" y="1481328"/>
-            <a:ext cx="2103120" cy="1371600"/>
+            <a:off x="914400" y="1828800"/>
+            <a:ext cx="4800600" cy="1371600"/>
           </a:xfrm>
           <a:prstGeom prst="rect">
             <a:avLst/>
@@ -4777,17 +4403,31 @@
               <a:buNone/>
             </a:pPr>
             <a:r>
-              <a:rPr lang="en-US" sz="4600" b="1" dirty="0">
-                <a:solidFill>
-                  <a:srgbClr val="0E7C86"/>
+              <a:rPr lang="en-US" sz="6000" b="1" dirty="0">
+                <a:solidFill>
+                  <a:srgbClr val="B45309"/>
                 </a:solidFill>
                 <a:latin typeface="Georgia" pitchFamily="34" charset="0"/>
                 <a:ea typeface="Georgia" pitchFamily="34" charset="-122"/>
                 <a:cs typeface="Georgia" pitchFamily="34" charset="-120"/>
               </a:rPr>
-              <a:t>88%</a:t>
-            </a:r>
-            <a:endParaRPr lang="en-US" sz="4600" dirty="0"/>
+              <a:t>98%</a:t>
+            </a:r>
+            <a:endParaRPr lang="en-US" sz="6000" dirty="0"/>
+          </a:p>
+          <a:p>
+            <a:pPr indent="0" marL="0">
+              <a:buNone/>
+            </a:pPr>
+            <a:r>
+              <a:rPr lang="en-US" sz="1400" dirty="0">
+                <a:solidFill>
+                  <a:srgbClr val="1E293B"/>
+                </a:solidFill>
+              </a:rPr>
+              <a:t>of France's binary answers are "yes"</a:t>
+            </a:r>
+            <a:endParaRPr lang="en-US" sz="6000" dirty="0"/>
           </a:p>
         </p:txBody>
       </p:sp>
@@ -4799,8 +4439,8 @@
         </p:nvSpPr>
         <p:spPr>
           <a:xfrm>
-            <a:off x="2971800" y="1481328"/>
-            <a:ext cx="2926080" cy="1371600"/>
+            <a:off x="914400" y="3520440"/>
+            <a:ext cx="4800600" cy="640080"/>
           </a:xfrm>
           <a:prstGeom prst="rect">
             <a:avLst/>
@@ -4814,12 +4454,12 @@
           <a:p>
             <a:pPr indent="0" marL="0">
               <a:lnSpc>
-                <a:spcPct val="105000"/>
+                <a:spcPct val="110000"/>
               </a:lnSpc>
               <a:buNone/>
             </a:pPr>
             <a:r>
-              <a:rPr lang="en-US" sz="1400" dirty="0">
+              <a:rPr lang="en-US" sz="1450" dirty="0">
                 <a:solidFill>
                   <a:srgbClr val="1E293B"/>
                 </a:solidFill>
@@ -4827,30 +4467,211 @@
                 <a:ea typeface="Calibri" pitchFamily="34" charset="-122"/>
                 <a:cs typeface="Calibri" pitchFamily="34" charset="-120"/>
               </a:rPr>
-              <a:t>agreement with ODMI when the swarm commits an answer (136 of 154 decided pairs).</a:t>
-            </a:r>
-            <a:endParaRPr lang="en-US" sz="1400" dirty="0"/>
-          </a:p>
-        </p:txBody>
-      </p:sp>
-      <p:sp>
-        <p:nvSpPr>
-          <p:cNvPr id="7" name="Shape 5"/>
-          <p:cNvSpPr/>
-          <p:nvPr/>
-        </p:nvSpPr>
-        <p:spPr>
-          <a:xfrm>
-            <a:off x="6126480" y="1417320"/>
-            <a:ext cx="5394960" cy="1508760"/>
+              <a:t>France's gold is 121 "yes" and a single "no" (124 binary questions).</a:t>
+            </a:r>
+            <a:endParaRPr lang="en-US" sz="1450" dirty="0"/>
+          </a:p>
+        </p:txBody>
+      </p:sp>
+      <p:sp>
+        <p:nvSpPr>
+          <p:cNvPr id="7" name="Text 5"/>
+          <p:cNvSpPr/>
+          <p:nvPr/>
+        </p:nvSpPr>
+        <p:spPr>
+          <a:xfrm>
+            <a:off x="914400" y="4251960"/>
+            <a:ext cx="4800600" cy="1463040"/>
+          </a:xfrm>
+          <a:prstGeom prst="rect">
+            <a:avLst/>
+          </a:prstGeom>
+          <a:noFill/>
+          <a:ln/>
+        </p:spPr>
+        <p:txBody>
+          <a:bodyPr wrap="square" rtlCol="0" anchor="ctr"/>
+          <a:lstStyle/>
+          <a:p>
+            <a:pPr indent="0" marL="0">
+              <a:lnSpc>
+                <a:spcPct val="115000"/>
+              </a:lnSpc>
+              <a:buNone/>
+            </a:pPr>
+            <a:r>
+              <a:rPr lang="en-US" sz="1450" b="1" dirty="0">
+                <a:solidFill>
+                  <a:srgbClr val="0F2A43"/>
+                </a:solidFill>
+                <a:latin typeface="Calibri" pitchFamily="34" charset="0"/>
+                <a:ea typeface="Calibri" pitchFamily="34" charset="-122"/>
+                <a:cs typeface="Calibri" pitchFamily="34" charset="-120"/>
+              </a:rPr>
+              <a:t>A model that always answers "yes" scores 98% and never exposes one false positive. Raw accuracy here measures fluency, not honesty.</a:t>
+            </a:r>
+            <a:endParaRPr lang="en-US" sz="1450" dirty="0"/>
+          </a:p>
+        </p:txBody>
+      </p:sp>
+      <p:sp>
+        <p:nvSpPr>
+          <p:cNvPr id="8" name="Shape 6"/>
+          <p:cNvSpPr/>
+          <p:nvPr/>
+        </p:nvSpPr>
+        <p:spPr>
+          <a:xfrm>
+            <a:off x="6172200" y="1280160"/>
+            <a:ext cx="5349240" cy="2514600"/>
           </a:xfrm>
           <a:prstGeom prst="roundRect">
             <a:avLst>
-              <a:gd name="adj" fmla="val 4242"/>
+              <a:gd name="adj" fmla="val 2182"/>
             </a:avLst>
           </a:prstGeom>
           <a:solidFill>
-            <a:srgbClr val="FFFFFF"/>
+            <a:srgbClr val="0F2A43"/>
+          </a:solidFill>
+          <a:ln/>
+          <a:effectLst>
+            <a:outerShdw sx="100000" sy="100000" kx="0" ky="0" algn="bl" rotWithShape="0" blurRad="88900" dist="25400" dir="8100000">
+              <a:srgbClr val="0F2A43">
+                <a:alpha val="12000"/>
+              </a:srgbClr>
+            </a:outerShdw>
+          </a:effectLst>
+        </p:spPr>
+      </p:sp>
+      <p:sp>
+        <p:nvSpPr>
+          <p:cNvPr id="9" name="Text 7"/>
+          <p:cNvSpPr/>
+          <p:nvPr/>
+        </p:nvSpPr>
+        <p:spPr>
+          <a:xfrm>
+            <a:off x="6446520" y="1463040"/>
+            <a:ext cx="8229600" cy="292608"/>
+          </a:xfrm>
+          <a:prstGeom prst="rect">
+            <a:avLst/>
+          </a:prstGeom>
+          <a:noFill/>
+          <a:ln/>
+        </p:spPr>
+        <p:txBody>
+          <a:bodyPr wrap="square" rtlCol="0" anchor="ctr"/>
+          <a:lstStyle/>
+          <a:p>
+            <a:pPr indent="0" marL="0">
+              <a:buNone/>
+            </a:pPr>
+            <a:r>
+              <a:rPr lang="en-US" sz="1250" b="1" spc="200" kern="0" dirty="0">
+                <a:solidFill>
+                  <a:srgbClr val="5EC8C8"/>
+                </a:solidFill>
+                <a:latin typeface="Calibri" pitchFamily="34" charset="0"/>
+                <a:ea typeface="Calibri" pitchFamily="34" charset="-122"/>
+                <a:cs typeface="Calibri" pitchFamily="34" charset="-120"/>
+              </a:rPr>
+              <a:t>THE FIX: A BALANCED TESTBED</a:t>
+            </a:r>
+            <a:endParaRPr lang="en-US" sz="1250" dirty="0"/>
+          </a:p>
+        </p:txBody>
+      </p:sp>
+      <p:sp>
+        <p:nvSpPr>
+          <p:cNvPr id="10" name="Text 8"/>
+          <p:cNvSpPr/>
+          <p:nvPr/>
+        </p:nvSpPr>
+        <p:spPr>
+          <a:xfrm>
+            <a:off x="6446520" y="1828800"/>
+            <a:ext cx="4846320" cy="1828800"/>
+          </a:xfrm>
+          <a:prstGeom prst="rect">
+            <a:avLst/>
+          </a:prstGeom>
+          <a:noFill/>
+          <a:ln/>
+        </p:spPr>
+        <p:txBody>
+          <a:bodyPr wrap="square" rtlCol="0" anchor="ctr"/>
+          <a:lstStyle/>
+          <a:p>
+            <a:pPr indent="0" marL="0">
+              <a:lnSpc>
+                <a:spcPct val="112000"/>
+              </a:lnSpc>
+              <a:buNone/>
+            </a:pPr>
+            <a:r>
+              <a:rPr lang="en-US" sz="1400" dirty="0">
+                <a:solidFill>
+                  <a:srgbClr val="CADCFC"/>
+                </a:solidFill>
+                <a:latin typeface="Calibri" pitchFamily="34" charset="0"/>
+                <a:ea typeface="Calibri" pitchFamily="34" charset="-122"/>
+                <a:cs typeface="Calibri" pitchFamily="34" charset="-120"/>
+              </a:rPr>
+              <a:t>Test on Malta: English is official, so a miss is not a translation artefact. A frozen 60-pair set, 30 "no" / 30 "yes".</a:t>
+            </a:r>
+            <a:endParaRPr lang="en-US" sz="1400" dirty="0"/>
+          </a:p>
+          <a:p>
+            <a:pPr indent="0" marL="0">
+              <a:lnSpc>
+                <a:spcPct val="112000"/>
+              </a:lnSpc>
+              <a:buNone/>
+            </a:pPr>
+            <a:endParaRPr lang="en-US" sz="1400" dirty="0"/>
+          </a:p>
+          <a:p>
+            <a:pPr indent="0" marL="0">
+              <a:lnSpc>
+                <a:spcPct val="112000"/>
+              </a:lnSpc>
+              <a:buNone/>
+            </a:pPr>
+            <a:r>
+              <a:rPr lang="en-US" sz="1400" dirty="0">
+                <a:solidFill>
+                  <a:srgbClr val="CADCFC"/>
+                </a:solidFill>
+                <a:latin typeface="Calibri" pitchFamily="34" charset="0"/>
+                <a:ea typeface="Calibri" pitchFamily="34" charset="-122"/>
+                <a:cs typeface="Calibri" pitchFamily="34" charset="-120"/>
+              </a:rPr>
+              <a:t>Score with metrics that catch fabrication: false-positive rate, true-negative recall, Youden's J, not raw accuracy.</a:t>
+            </a:r>
+            <a:endParaRPr lang="en-US" sz="1400" dirty="0"/>
+          </a:p>
+        </p:txBody>
+      </p:sp>
+      <p:sp>
+        <p:nvSpPr>
+          <p:cNvPr id="11" name="Shape 9"/>
+          <p:cNvSpPr/>
+          <p:nvPr/>
+        </p:nvSpPr>
+        <p:spPr>
+          <a:xfrm>
+            <a:off x="6172200" y="3977640"/>
+            <a:ext cx="5349240" cy="2240280"/>
+          </a:xfrm>
+          <a:prstGeom prst="roundRect">
+            <a:avLst>
+              <a:gd name="adj" fmla="val 2449"/>
+            </a:avLst>
+          </a:prstGeom>
+          <a:solidFill>
+            <a:srgbClr val="F1F5F9"/>
           </a:solidFill>
           <a:ln w="12700">
             <a:solidFill>
@@ -4869,14 +4690,14 @@
       </p:sp>
       <p:sp>
         <p:nvSpPr>
-          <p:cNvPr id="8" name="Text 6"/>
-          <p:cNvSpPr/>
-          <p:nvPr/>
-        </p:nvSpPr>
-        <p:spPr>
-          <a:xfrm>
-            <a:off x="6355080" y="1481328"/>
-            <a:ext cx="2103120" cy="1371600"/>
+          <p:cNvPr id="12" name="Text 10"/>
+          <p:cNvSpPr/>
+          <p:nvPr/>
+        </p:nvSpPr>
+        <p:spPr>
+          <a:xfrm>
+            <a:off x="6446520" y="4160520"/>
+            <a:ext cx="8229600" cy="292608"/>
           </a:xfrm>
           <a:prstGeom prst="rect">
             <a:avLst/>
@@ -4892,30 +4713,30 @@
               <a:buNone/>
             </a:pPr>
             <a:r>
-              <a:rPr lang="en-US" sz="4600" b="1" dirty="0">
-                <a:solidFill>
-                  <a:srgbClr val="B45309"/>
-                </a:solidFill>
-                <a:latin typeface="Georgia" pitchFamily="34" charset="0"/>
-                <a:ea typeface="Georgia" pitchFamily="34" charset="-122"/>
-                <a:cs typeface="Georgia" pitchFamily="34" charset="-120"/>
-              </a:rPr>
-              <a:t>27%</a:t>
-            </a:r>
-            <a:endParaRPr lang="en-US" sz="4600" dirty="0"/>
-          </a:p>
-        </p:txBody>
-      </p:sp>
-      <p:sp>
-        <p:nvSpPr>
-          <p:cNvPr id="9" name="Text 7"/>
-          <p:cNvSpPr/>
-          <p:nvPr/>
-        </p:nvSpPr>
-        <p:spPr>
-          <a:xfrm>
-            <a:off x="8458200" y="1481328"/>
-            <a:ext cx="2834640" cy="1371600"/>
+              <a:rPr lang="en-US" sz="1250" b="1" spc="200" kern="0" dirty="0">
+                <a:solidFill>
+                  <a:srgbClr val="0E7C86"/>
+                </a:solidFill>
+                <a:latin typeface="Calibri" pitchFamily="34" charset="0"/>
+                <a:ea typeface="Calibri" pitchFamily="34" charset="-122"/>
+                <a:cs typeface="Calibri" pitchFamily="34" charset="-120"/>
+              </a:rPr>
+              <a:t>EXPERIMENTS RUNNING TO FIND THE BEST CONFIG</a:t>
+            </a:r>
+            <a:endParaRPr lang="en-US" sz="1250" dirty="0"/>
+          </a:p>
+        </p:txBody>
+      </p:sp>
+      <p:sp>
+        <p:nvSpPr>
+          <p:cNvPr id="13" name="Text 11"/>
+          <p:cNvSpPr/>
+          <p:nvPr/>
+        </p:nvSpPr>
+        <p:spPr>
+          <a:xfrm>
+            <a:off x="6446520" y="4572000"/>
+            <a:ext cx="4846320" cy="1554480"/>
           </a:xfrm>
           <a:prstGeom prst="rect">
             <a:avLst/>
@@ -4931,388 +4752,138 @@
               <a:lnSpc>
                 <a:spcPct val="105000"/>
               </a:lnSpc>
-              <a:buNone/>
-            </a:pPr>
-            <a:r>
-              <a:rPr lang="en-US" sz="1400" dirty="0">
-                <a:solidFill>
-                  <a:srgbClr val="1E293B"/>
+              <a:spcAft>
+                <a:spcPts val="300"/>
+              </a:spcAft>
+              <a:buNone/>
+            </a:pPr>
+            <a:r>
+              <a:rPr lang="en-US" sz="1250" b="1" dirty="0">
+                <a:solidFill>
+                  <a:srgbClr val="0F2A43"/>
                 </a:solidFill>
                 <a:latin typeface="Calibri" pitchFamily="34" charset="0"/>
                 <a:ea typeface="Calibri" pitchFamily="34" charset="-122"/>
                 <a:cs typeface="Calibri" pitchFamily="34" charset="-120"/>
               </a:rPr>
-              <a:t>of pairs it abstains on rather than guess (an honest "inconclusive").</a:t>
-            </a:r>
-            <a:endParaRPr lang="en-US" sz="1400" dirty="0"/>
-          </a:p>
-        </p:txBody>
-      </p:sp>
-      <p:sp>
-        <p:nvSpPr>
-          <p:cNvPr id="10" name="Text 8"/>
-          <p:cNvSpPr/>
-          <p:nvPr/>
-        </p:nvSpPr>
-        <p:spPr>
-          <a:xfrm>
-            <a:off x="640080" y="3154680"/>
-            <a:ext cx="5394960" cy="365760"/>
-          </a:xfrm>
-          <a:prstGeom prst="rect">
-            <a:avLst/>
-          </a:prstGeom>
-          <a:noFill/>
-          <a:ln/>
-        </p:spPr>
-        <p:txBody>
-          <a:bodyPr wrap="square" rtlCol="0" anchor="ctr"/>
-          <a:lstStyle/>
-          <a:p>
-            <a:pPr indent="0" marL="0">
-              <a:buNone/>
-            </a:pPr>
-            <a:r>
-              <a:rPr lang="en-US" sz="1400" b="1" dirty="0">
-                <a:solidFill>
-                  <a:srgbClr val="0F2A43"/>
+              <a:t>Verifier strategies</a:t>
+            </a:r>
+            <a:endParaRPr lang="en-US" sz="1250" dirty="0"/>
+          </a:p>
+          <a:p>
+            <a:pPr indent="0" marL="0">
+              <a:lnSpc>
+                <a:spcPct val="105000"/>
+              </a:lnSpc>
+              <a:spcAft>
+                <a:spcPts val="300"/>
+              </a:spcAft>
+              <a:buNone/>
+            </a:pPr>
+            <a:r>
+              <a:rPr lang="en-US" sz="1250" dirty="0">
+                <a:solidFill>
+                  <a:srgbClr val="1E293B"/>
                 </a:solidFill>
                 <a:latin typeface="Calibri" pitchFamily="34" charset="0"/>
                 <a:ea typeface="Calibri" pitchFamily="34" charset="-122"/>
                 <a:cs typeface="Calibri" pitchFamily="34" charset="-120"/>
               </a:rPr>
-              <a:t>Agreement when committing, by country</a:t>
-            </a:r>
-            <a:endParaRPr lang="en-US" sz="1400" dirty="0"/>
-          </a:p>
-        </p:txBody>
-      </p:sp>
-      <p:graphicFrame>
-        <p:nvGraphicFramePr>
-          <p:cNvPr id="11" name="Chart 0" descr=""/>
-          <p:cNvGraphicFramePr/>
-          <p:nvPr/>
-        </p:nvGraphicFramePr>
-        <p:xfrm>
-          <a:off x="502920" y="3566160"/>
-          <a:ext cx="5394960" cy="2743200"/>
-        </p:xfrm>
-        <a:graphic xmlns:a="http://schemas.openxmlformats.org/drawingml/2006/main">
-          <a:graphicData uri="http://schemas.openxmlformats.org/drawingml/2006/chart">
-            <c:chart xmlns:c="http://schemas.openxmlformats.org/drawingml/2006/chart" r:id="rId1"/>
-          </a:graphicData>
-        </a:graphic>
-      </p:graphicFrame>
-      <p:sp>
-        <p:nvSpPr>
-          <p:cNvPr id="12" name="Text 9"/>
-          <p:cNvSpPr/>
-          <p:nvPr/>
-        </p:nvSpPr>
-        <p:spPr>
-          <a:xfrm>
-            <a:off x="640080" y="6309360"/>
-            <a:ext cx="5394960" cy="274320"/>
-          </a:xfrm>
-          <a:prstGeom prst="rect">
-            <a:avLst/>
-          </a:prstGeom>
-          <a:noFill/>
-          <a:ln/>
-        </p:spPr>
-        <p:txBody>
-          <a:bodyPr wrap="square" rtlCol="0" anchor="ctr"/>
-          <a:lstStyle/>
-          <a:p>
-            <a:pPr indent="0" marL="0">
-              <a:buNone/>
-            </a:pPr>
-            <a:r>
-              <a:rPr lang="en-US" sz="1050" i="1" dirty="0">
-                <a:solidFill>
-                  <a:srgbClr val="64748B"/>
+              <a:t>how hard to push the Verifier to disprove a claim.</a:t>
+            </a:r>
+            <a:endParaRPr lang="en-US" sz="1250" dirty="0"/>
+          </a:p>
+          <a:p>
+            <a:pPr indent="0" marL="0">
+              <a:lnSpc>
+                <a:spcPct val="105000"/>
+              </a:lnSpc>
+              <a:spcAft>
+                <a:spcPts val="300"/>
+              </a:spcAft>
+              <a:buNone/>
+            </a:pPr>
+            <a:r>
+              <a:rPr lang="en-US" sz="1250" b="1" dirty="0">
+                <a:solidFill>
+                  <a:srgbClr val="0F2A43"/>
                 </a:solidFill>
                 <a:latin typeface="Calibri" pitchFamily="34" charset="0"/>
                 <a:ea typeface="Calibri" pitchFamily="34" charset="-122"/>
                 <a:cs typeface="Calibri" pitchFamily="34" charset="-120"/>
               </a:rPr>
-              <a:t>Other countries n&lt;10; not shown.</a:t>
-            </a:r>
-            <a:endParaRPr lang="en-US" sz="1050" dirty="0"/>
-          </a:p>
-        </p:txBody>
-      </p:sp>
-      <p:sp>
-        <p:nvSpPr>
-          <p:cNvPr id="13" name="Shape 10"/>
-          <p:cNvSpPr/>
-          <p:nvPr/>
-        </p:nvSpPr>
-        <p:spPr>
-          <a:xfrm>
-            <a:off x="6126480" y="3154680"/>
-            <a:ext cx="5394960" cy="3154680"/>
-          </a:xfrm>
-          <a:prstGeom prst="roundRect">
-            <a:avLst>
-              <a:gd name="adj" fmla="val 2029"/>
-            </a:avLst>
-          </a:prstGeom>
-          <a:solidFill>
-            <a:srgbClr val="0F2A43"/>
-          </a:solidFill>
-          <a:ln/>
-          <a:effectLst>
-            <a:outerShdw sx="100000" sy="100000" kx="0" ky="0" algn="bl" rotWithShape="0" blurRad="88900" dist="25400" dir="8100000">
-              <a:srgbClr val="0F2A43">
-                <a:alpha val="12000"/>
-              </a:srgbClr>
-            </a:outerShdw>
-          </a:effectLst>
-        </p:spPr>
-      </p:sp>
-      <p:sp>
-        <p:nvSpPr>
-          <p:cNvPr id="14" name="Text 11"/>
-          <p:cNvSpPr/>
-          <p:nvPr/>
-        </p:nvSpPr>
-        <p:spPr>
-          <a:xfrm>
-            <a:off x="6355080" y="3337560"/>
-            <a:ext cx="4937760" cy="411480"/>
-          </a:xfrm>
-          <a:prstGeom prst="rect">
-            <a:avLst/>
-          </a:prstGeom>
-          <a:noFill/>
-          <a:ln/>
-        </p:spPr>
-        <p:txBody>
-          <a:bodyPr wrap="square" rtlCol="0" anchor="ctr"/>
-          <a:lstStyle/>
-          <a:p>
-            <a:pPr indent="0" marL="0">
-              <a:buNone/>
-            </a:pPr>
-            <a:r>
-              <a:rPr lang="en-US" sz="1800" b="1" dirty="0">
-                <a:solidFill>
-                  <a:srgbClr val="5EC8C8"/>
+              <a:t>Retry chaining</a:t>
+            </a:r>
+            <a:endParaRPr lang="en-US" sz="1250" dirty="0"/>
+          </a:p>
+          <a:p>
+            <a:pPr indent="0" marL="0">
+              <a:lnSpc>
+                <a:spcPct val="105000"/>
+              </a:lnSpc>
+              <a:spcAft>
+                <a:spcPts val="300"/>
+              </a:spcAft>
+              <a:buNone/>
+            </a:pPr>
+            <a:r>
+              <a:rPr lang="en-US" sz="1250" dirty="0">
+                <a:solidFill>
+                  <a:srgbClr val="1E293B"/>
                 </a:solidFill>
                 <a:latin typeface="Calibri" pitchFamily="34" charset="0"/>
                 <a:ea typeface="Calibri" pitchFamily="34" charset="-122"/>
                 <a:cs typeface="Calibri" pitchFamily="34" charset="-120"/>
               </a:rPr>
-              <a:t>The self-report ceiling</a:t>
-            </a:r>
-            <a:endParaRPr lang="en-US" sz="1800" dirty="0"/>
-          </a:p>
-        </p:txBody>
-      </p:sp>
-      <p:sp>
-        <p:nvSpPr>
-          <p:cNvPr id="15" name="Text 12"/>
-          <p:cNvSpPr/>
-          <p:nvPr/>
-        </p:nvSpPr>
-        <p:spPr>
-          <a:xfrm>
-            <a:off x="6355080" y="3794760"/>
-            <a:ext cx="4937760" cy="1645920"/>
-          </a:xfrm>
-          <a:prstGeom prst="rect">
-            <a:avLst/>
-          </a:prstGeom>
-          <a:noFill/>
-          <a:ln/>
-        </p:spPr>
-        <p:txBody>
-          <a:bodyPr wrap="square" rtlCol="0" anchor="ctr"/>
-          <a:lstStyle/>
+              <a:t>recover more answers without committing more false positives.</a:t>
+            </a:r>
+            <a:endParaRPr lang="en-US" sz="1250" dirty="0"/>
+          </a:p>
           <a:p>
             <a:pPr indent="0" marL="0">
               <a:lnSpc>
-                <a:spcPct val="115000"/>
+                <a:spcPct val="105000"/>
               </a:lnSpc>
-              <a:buNone/>
-            </a:pPr>
-            <a:r>
-              <a:rPr lang="en-US" sz="1500" dirty="0">
-                <a:solidFill>
-                  <a:srgbClr val="CADCFC"/>
+              <a:spcAft>
+                <a:spcPts val="300"/>
+              </a:spcAft>
+              <a:buNone/>
+            </a:pPr>
+            <a:r>
+              <a:rPr lang="en-US" sz="1250" b="1" dirty="0">
+                <a:solidFill>
+                  <a:srgbClr val="0F2A43"/>
                 </a:solidFill>
                 <a:latin typeface="Calibri" pitchFamily="34" charset="0"/>
                 <a:ea typeface="Calibri" pitchFamily="34" charset="-122"/>
                 <a:cs typeface="Calibri" pitchFamily="34" charset="-120"/>
               </a:rPr>
-              <a:t>France self-reported </a:t>
-            </a:r>
+              <a:t>Cost vs quality</a:t>
+            </a:r>
+            <a:endParaRPr lang="en-US" sz="1250" dirty="0"/>
+          </a:p>
+          <a:p>
             <a:pPr indent="0" marL="0">
               <a:lnSpc>
-                <a:spcPct val="115000"/>
+                <a:spcPct val="105000"/>
               </a:lnSpc>
-              <a:buNone/>
-            </a:pPr>
-            <a:r>
-              <a:rPr lang="en-US" sz="1500" b="1" dirty="0">
-                <a:solidFill>
-                  <a:srgbClr val="FFFFFF"/>
+              <a:spcAft>
+                <a:spcPts val="300"/>
+              </a:spcAft>
+              <a:buNone/>
+            </a:pPr>
+            <a:r>
+              <a:rPr lang="en-US" sz="1250" dirty="0">
+                <a:solidFill>
+                  <a:srgbClr val="1E293B"/>
                 </a:solidFill>
                 <a:latin typeface="Calibri" pitchFamily="34" charset="0"/>
                 <a:ea typeface="Calibri" pitchFamily="34" charset="-122"/>
                 <a:cs typeface="Calibri" pitchFamily="34" charset="-120"/>
               </a:rPr>
-              <a:t>&gt;90%</a:t>
-            </a:r>
-            <a:pPr indent="0" marL="0">
-              <a:lnSpc>
-                <a:spcPct val="115000"/>
-              </a:lnSpc>
-              <a:buNone/>
-            </a:pPr>
-            <a:r>
-              <a:rPr lang="en-US" sz="1500" dirty="0">
-                <a:solidFill>
-                  <a:srgbClr val="CADCFC"/>
-                </a:solidFill>
-                <a:latin typeface="Calibri" pitchFamily="34" charset="0"/>
-                <a:ea typeface="Calibri" pitchFamily="34" charset="-122"/>
-                <a:cs typeface="Calibri" pitchFamily="34" charset="-120"/>
-              </a:rPr>
-              <a:t> on licence coverage and metadata conformance.</a:t>
-            </a:r>
-            <a:endParaRPr lang="en-US" sz="1500" dirty="0"/>
-          </a:p>
-          <a:p>
-            <a:pPr indent="0" marL="0">
-              <a:lnSpc>
-                <a:spcPct val="115000"/>
-              </a:lnSpc>
-              <a:buNone/>
-            </a:pPr>
-            <a:r>
-              <a:rPr lang="en-US" sz="1500" dirty="0">
-                <a:solidFill>
-                  <a:srgbClr val="CADCFC"/>
-                </a:solidFill>
-                <a:latin typeface="Calibri" pitchFamily="34" charset="0"/>
-                <a:ea typeface="Calibri" pitchFamily="34" charset="-122"/>
-                <a:cs typeface="Calibri" pitchFamily="34" charset="-120"/>
-              </a:rPr>
-              <a:t>Independent recompute from the portal reads </a:t>
-            </a:r>
-            <a:pPr indent="0" marL="0">
-              <a:lnSpc>
-                <a:spcPct val="115000"/>
-              </a:lnSpc>
-              <a:buNone/>
-            </a:pPr>
-            <a:r>
-              <a:rPr lang="en-US" sz="1500" b="1" dirty="0">
-                <a:solidFill>
-                  <a:srgbClr val="FCA5A5"/>
-                </a:solidFill>
-                <a:latin typeface="Calibri" pitchFamily="34" charset="0"/>
-                <a:ea typeface="Calibri" pitchFamily="34" charset="-122"/>
-                <a:cs typeface="Calibri" pitchFamily="34" charset="-120"/>
-              </a:rPr>
-              <a:t>~38%</a:t>
-            </a:r>
-            <a:pPr indent="0" marL="0">
-              <a:lnSpc>
-                <a:spcPct val="115000"/>
-              </a:lnSpc>
-              <a:buNone/>
-            </a:pPr>
-            <a:r>
-              <a:rPr lang="en-US" sz="1500" dirty="0">
-                <a:solidFill>
-                  <a:srgbClr val="CADCFC"/>
-                </a:solidFill>
-                <a:latin typeface="Calibri" pitchFamily="34" charset="0"/>
-                <a:ea typeface="Calibri" pitchFamily="34" charset="-122"/>
-                <a:cs typeface="Calibri" pitchFamily="34" charset="-120"/>
-              </a:rPr>
-              <a:t> and </a:t>
-            </a:r>
-            <a:pPr indent="0" marL="0">
-              <a:lnSpc>
-                <a:spcPct val="115000"/>
-              </a:lnSpc>
-              <a:buNone/>
-            </a:pPr>
-            <a:r>
-              <a:rPr lang="en-US" sz="1500" b="1" dirty="0">
-                <a:solidFill>
-                  <a:srgbClr val="FCA5A5"/>
-                </a:solidFill>
-                <a:latin typeface="Calibri" pitchFamily="34" charset="0"/>
-                <a:ea typeface="Calibri" pitchFamily="34" charset="-122"/>
-                <a:cs typeface="Calibri" pitchFamily="34" charset="-120"/>
-              </a:rPr>
-              <a:t>~32%</a:t>
-            </a:r>
-            <a:pPr indent="0" marL="0">
-              <a:lnSpc>
-                <a:spcPct val="115000"/>
-              </a:lnSpc>
-              <a:buNone/>
-            </a:pPr>
-            <a:r>
-              <a:rPr lang="en-US" sz="1500" dirty="0">
-                <a:solidFill>
-                  <a:srgbClr val="CADCFC"/>
-                </a:solidFill>
-                <a:latin typeface="Calibri" pitchFamily="34" charset="0"/>
-                <a:ea typeface="Calibri" pitchFamily="34" charset="-122"/>
-                <a:cs typeface="Calibri" pitchFamily="34" charset="-120"/>
-              </a:rPr>
-              <a:t>.</a:t>
-            </a:r>
-            <a:endParaRPr lang="en-US" sz="1500" dirty="0"/>
-          </a:p>
-        </p:txBody>
-      </p:sp>
-      <p:sp>
-        <p:nvSpPr>
-          <p:cNvPr id="16" name="Text 13"/>
-          <p:cNvSpPr/>
-          <p:nvPr/>
-        </p:nvSpPr>
-        <p:spPr>
-          <a:xfrm>
-            <a:off x="6355080" y="5394960"/>
-            <a:ext cx="4937760" cy="731520"/>
-          </a:xfrm>
-          <a:prstGeom prst="rect">
-            <a:avLst/>
-          </a:prstGeom>
-          <a:noFill/>
-          <a:ln/>
-        </p:spPr>
-        <p:txBody>
-          <a:bodyPr wrap="square" rtlCol="0" anchor="ctr"/>
-          <a:lstStyle/>
-          <a:p>
-            <a:pPr indent="0" marL="0">
-              <a:lnSpc>
-                <a:spcPct val="105000"/>
-              </a:lnSpc>
-              <a:buNone/>
-            </a:pPr>
-            <a:r>
-              <a:rPr lang="en-US" sz="1400" i="1" dirty="0">
-                <a:solidFill>
-                  <a:srgbClr val="FFFFFF"/>
-                </a:solidFill>
-                <a:latin typeface="Calibri" pitchFamily="34" charset="0"/>
-                <a:ea typeface="Calibri" pitchFamily="34" charset="-122"/>
-                <a:cs typeface="Calibri" pitchFamily="34" charset="-120"/>
-              </a:rPr>
-              <a:t>So the system can be more accurate than the ground truth, not just track it.</a:t>
-            </a:r>
-            <a:endParaRPr lang="en-US" sz="1400" dirty="0"/>
+              <a:t>how much accuracy a deeper search actually buys.</a:t>
+            </a:r>
+            <a:endParaRPr lang="en-US" sz="1250" dirty="0"/>
           </a:p>
         </p:txBody>
       </p:sp>
@@ -5356,7 +4927,7 @@
         </p:nvSpPr>
         <p:spPr>
           <a:xfrm>
-            <a:off x="640080" y="502920"/>
+            <a:off x="640080" y="457200"/>
             <a:ext cx="10972800" cy="731520"/>
           </a:xfrm>
           <a:prstGeom prst="rect">
@@ -5381,7 +4952,7 @@
                 <a:ea typeface="Georgia" pitchFamily="34" charset="-122"/>
                 <a:cs typeface="Georgia" pitchFamily="34" charset="-120"/>
               </a:rPr>
-              <a:t>What we are testing next</a:t>
+              <a:t>What the balanced test shows</a:t>
             </a:r>
             <a:endParaRPr lang="en-US" sz="3200" dirty="0"/>
           </a:p>
@@ -5389,18 +4960,57 @@
       </p:sp>
       <p:sp>
         <p:nvSpPr>
-          <p:cNvPr id="3" name="Shape 1"/>
-          <p:cNvSpPr/>
-          <p:nvPr/>
-        </p:nvSpPr>
-        <p:spPr>
-          <a:xfrm>
-            <a:off x="640080" y="1554480"/>
-            <a:ext cx="3566160" cy="2606040"/>
+          <p:cNvPr id="3" name="Text 1"/>
+          <p:cNvSpPr/>
+          <p:nvPr/>
+        </p:nvSpPr>
+        <p:spPr>
+          <a:xfrm>
+            <a:off x="640080" y="1143000"/>
+            <a:ext cx="10972800" cy="365760"/>
+          </a:xfrm>
+          <a:prstGeom prst="rect">
+            <a:avLst/>
+          </a:prstGeom>
+          <a:noFill/>
+          <a:ln/>
+        </p:spPr>
+        <p:txBody>
+          <a:bodyPr wrap="square" rtlCol="0" anchor="ctr"/>
+          <a:lstStyle/>
+          <a:p>
+            <a:pPr indent="0" marL="0">
+              <a:buNone/>
+            </a:pPr>
+            <a:r>
+              <a:rPr lang="en-US" sz="1300" i="1" dirty="0">
+                <a:solidFill>
+                  <a:srgbClr val="5EC8C8"/>
+                </a:solidFill>
+                <a:latin typeface="Calibri" pitchFamily="34" charset="0"/>
+                <a:ea typeface="Calibri" pitchFamily="34" charset="-122"/>
+                <a:cs typeface="Calibri" pitchFamily="34" charset="-120"/>
+              </a:rPr>
+              <a:t>Malta, 60-pair base-rate-balanced baseline.</a:t>
+            </a:r>
+            <a:endParaRPr lang="en-US" sz="1300" dirty="0"/>
+          </a:p>
+        </p:txBody>
+      </p:sp>
+      <p:sp>
+        <p:nvSpPr>
+          <p:cNvPr id="4" name="Shape 2"/>
+          <p:cNvSpPr/>
+          <p:nvPr/>
+        </p:nvSpPr>
+        <p:spPr>
+          <a:xfrm>
+            <a:off x="640080" y="1600200"/>
+            <a:ext cx="3520440" cy="2011680"/>
           </a:xfrm>
           <a:prstGeom prst="roundRect">
             <a:avLst>
-              <a:gd name="adj" fmla="val 2456"/>
+              <a:gd name="adj" fmla="val 2727"/>
             </a:avLst>
           </a:prstGeom>
           <a:solidFill>
@@ -5423,34 +5033,14 @@
       </p:sp>
       <p:sp>
         <p:nvSpPr>
-          <p:cNvPr id="4" name="Shape 2"/>
-          <p:cNvSpPr/>
-          <p:nvPr/>
-        </p:nvSpPr>
-        <p:spPr>
-          <a:xfrm>
-            <a:off x="960120" y="1920240"/>
-            <a:ext cx="502920" cy="502920"/>
-          </a:xfrm>
-          <a:prstGeom prst="ellipse">
-            <a:avLst/>
-          </a:prstGeom>
-          <a:solidFill>
-            <a:srgbClr val="0E7C86"/>
-          </a:solidFill>
-          <a:ln/>
-        </p:spPr>
-      </p:sp>
-      <p:sp>
-        <p:nvSpPr>
           <p:cNvPr id="5" name="Text 3"/>
           <p:cNvSpPr/>
           <p:nvPr/>
         </p:nvSpPr>
         <p:spPr>
           <a:xfrm>
-            <a:off x="960120" y="1920240"/>
-            <a:ext cx="502920" cy="502920"/>
+            <a:off x="868680" y="1783080"/>
+            <a:ext cx="3108960" cy="1645920"/>
           </a:xfrm>
           <a:prstGeom prst="rect">
             <a:avLst/>
@@ -5462,119 +5052,75 @@
           <a:bodyPr wrap="square" rtlCol="0" anchor="ctr"/>
           <a:lstStyle/>
           <a:p>
-            <a:pPr algn="ctr" indent="0" marL="0">
-              <a:buNone/>
-            </a:pPr>
-            <a:r>
-              <a:rPr lang="en-US" sz="1800" b="1" dirty="0">
+            <a:pPr indent="0" marL="0">
+              <a:lnSpc>
+                <a:spcPct val="105000"/>
+              </a:lnSpc>
+              <a:buNone/>
+            </a:pPr>
+            <a:r>
+              <a:rPr lang="en-US" sz="4400" b="1" dirty="0">
+                <a:solidFill>
+                  <a:srgbClr val="5EC8C8"/>
+                </a:solidFill>
+                <a:latin typeface="Georgia" pitchFamily="34" charset="0"/>
+                <a:ea typeface="Georgia" pitchFamily="34" charset="-122"/>
+                <a:cs typeface="Georgia" pitchFamily="34" charset="-120"/>
+              </a:rPr>
+              <a:t>0.87</a:t>
+            </a:r>
+            <a:endParaRPr lang="en-US" sz="4400" dirty="0"/>
+          </a:p>
+          <a:p>
+            <a:pPr indent="0" marL="0">
+              <a:lnSpc>
+                <a:spcPct val="105000"/>
+              </a:lnSpc>
+              <a:buNone/>
+            </a:pPr>
+            <a:r>
+              <a:rPr lang="en-US" sz="1400" b="1" dirty="0">
                 <a:solidFill>
                   <a:srgbClr val="FFFFFF"/>
                 </a:solidFill>
-                <a:latin typeface="Calibri" pitchFamily="34" charset="0"/>
-                <a:ea typeface="Calibri" pitchFamily="34" charset="-122"/>
-                <a:cs typeface="Calibri" pitchFamily="34" charset="-120"/>
-              </a:rPr>
-              <a:t>1</a:t>
-            </a:r>
-            <a:endParaRPr lang="en-US" sz="1800" dirty="0"/>
-          </a:p>
-        </p:txBody>
-      </p:sp>
-      <p:sp>
-        <p:nvSpPr>
-          <p:cNvPr id="6" name="Text 4"/>
-          <p:cNvSpPr/>
-          <p:nvPr/>
-        </p:nvSpPr>
-        <p:spPr>
-          <a:xfrm>
-            <a:off x="960120" y="2606040"/>
-            <a:ext cx="2926080" cy="457200"/>
-          </a:xfrm>
-          <a:prstGeom prst="rect">
-            <a:avLst/>
-          </a:prstGeom>
-          <a:noFill/>
-          <a:ln/>
-        </p:spPr>
-        <p:txBody>
-          <a:bodyPr wrap="square" rtlCol="0" anchor="ctr"/>
-          <a:lstStyle/>
-          <a:p>
-            <a:pPr indent="0" marL="0">
-              <a:buNone/>
-            </a:pPr>
-            <a:r>
-              <a:rPr lang="en-US" sz="1700" b="1" dirty="0">
-                <a:solidFill>
-                  <a:srgbClr val="5EC8C8"/>
-                </a:solidFill>
-                <a:latin typeface="Calibri" pitchFamily="34" charset="0"/>
-                <a:ea typeface="Calibri" pitchFamily="34" charset="-122"/>
-                <a:cs typeface="Calibri" pitchFamily="34" charset="-120"/>
-              </a:rPr>
-              <a:t>Verifier strategies</a:t>
-            </a:r>
-            <a:endParaRPr lang="en-US" sz="1700" dirty="0"/>
-          </a:p>
-        </p:txBody>
-      </p:sp>
-      <p:sp>
-        <p:nvSpPr>
-          <p:cNvPr id="7" name="Text 5"/>
-          <p:cNvSpPr/>
-          <p:nvPr/>
-        </p:nvSpPr>
-        <p:spPr>
-          <a:xfrm>
-            <a:off x="960120" y="3108960"/>
-            <a:ext cx="2926080" cy="914400"/>
-          </a:xfrm>
-          <a:prstGeom prst="rect">
-            <a:avLst/>
-          </a:prstGeom>
-          <a:noFill/>
-          <a:ln/>
-        </p:spPr>
-        <p:txBody>
-          <a:bodyPr wrap="square" rtlCol="0" anchor="ctr"/>
-          <a:lstStyle/>
+              </a:rPr>
+              <a:t>true-negative recall</a:t>
+            </a:r>
+            <a:endParaRPr lang="en-US" sz="4400" dirty="0"/>
+          </a:p>
           <a:p>
             <a:pPr indent="0" marL="0">
               <a:lnSpc>
-                <a:spcPct val="110000"/>
+                <a:spcPct val="105000"/>
               </a:lnSpc>
               <a:buNone/>
             </a:pPr>
             <a:r>
-              <a:rPr lang="en-US" sz="1350" dirty="0">
+              <a:rPr lang="en-US" sz="1250" dirty="0">
                 <a:solidFill>
                   <a:srgbClr val="CADCFC"/>
                 </a:solidFill>
-                <a:latin typeface="Calibri" pitchFamily="34" charset="0"/>
-                <a:ea typeface="Calibri" pitchFamily="34" charset="-122"/>
-                <a:cs typeface="Calibri" pitchFamily="34" charset="-120"/>
-              </a:rPr>
-              <a:t>How hard the Verifier is set against the evidence to disprove a claim before it stands.</a:t>
-            </a:r>
-            <a:endParaRPr lang="en-US" sz="1350" dirty="0"/>
-          </a:p>
-        </p:txBody>
-      </p:sp>
-      <p:sp>
-        <p:nvSpPr>
-          <p:cNvPr id="8" name="Shape 6"/>
-          <p:cNvSpPr/>
-          <p:nvPr/>
-        </p:nvSpPr>
-        <p:spPr>
-          <a:xfrm>
-            <a:off x="4489704" y="1554480"/>
-            <a:ext cx="3566160" cy="2606040"/>
+              </a:rPr>
+              <a:t>only 3 false positives in 23 committed "no" answers</a:t>
+            </a:r>
+            <a:endParaRPr lang="en-US" sz="4400" dirty="0"/>
+          </a:p>
+        </p:txBody>
+      </p:sp>
+      <p:sp>
+        <p:nvSpPr>
+          <p:cNvPr id="6" name="Shape 4"/>
+          <p:cNvSpPr/>
+          <p:nvPr/>
+        </p:nvSpPr>
+        <p:spPr>
+          <a:xfrm>
+            <a:off x="4334256" y="1600200"/>
+            <a:ext cx="3520440" cy="2011680"/>
           </a:xfrm>
           <a:prstGeom prst="roundRect">
             <a:avLst>
-              <a:gd name="adj" fmla="val 2456"/>
+              <a:gd name="adj" fmla="val 2727"/>
             </a:avLst>
           </a:prstGeom>
           <a:solidFill>
@@ -5597,34 +5143,14 @@
       </p:sp>
       <p:sp>
         <p:nvSpPr>
-          <p:cNvPr id="9" name="Shape 7"/>
-          <p:cNvSpPr/>
-          <p:nvPr/>
-        </p:nvSpPr>
-        <p:spPr>
-          <a:xfrm>
-            <a:off x="4809744" y="1920240"/>
-            <a:ext cx="502920" cy="502920"/>
-          </a:xfrm>
-          <a:prstGeom prst="ellipse">
-            <a:avLst/>
-          </a:prstGeom>
-          <a:solidFill>
-            <a:srgbClr val="0E7C86"/>
-          </a:solidFill>
-          <a:ln/>
-        </p:spPr>
-      </p:sp>
-      <p:sp>
-        <p:nvSpPr>
-          <p:cNvPr id="10" name="Text 8"/>
-          <p:cNvSpPr/>
-          <p:nvPr/>
-        </p:nvSpPr>
-        <p:spPr>
-          <a:xfrm>
-            <a:off x="4809744" y="1920240"/>
-            <a:ext cx="502920" cy="502920"/>
+          <p:cNvPr id="7" name="Text 5"/>
+          <p:cNvSpPr/>
+          <p:nvPr/>
+        </p:nvSpPr>
+        <p:spPr>
+          <a:xfrm>
+            <a:off x="4562856" y="1783080"/>
+            <a:ext cx="3108960" cy="1645920"/>
           </a:xfrm>
           <a:prstGeom prst="rect">
             <a:avLst/>
@@ -5636,119 +5162,75 @@
           <a:bodyPr wrap="square" rtlCol="0" anchor="ctr"/>
           <a:lstStyle/>
           <a:p>
-            <a:pPr algn="ctr" indent="0" marL="0">
-              <a:buNone/>
-            </a:pPr>
-            <a:r>
-              <a:rPr lang="en-US" sz="1800" b="1" dirty="0">
+            <a:pPr indent="0" marL="0">
+              <a:lnSpc>
+                <a:spcPct val="105000"/>
+              </a:lnSpc>
+              <a:buNone/>
+            </a:pPr>
+            <a:r>
+              <a:rPr lang="en-US" sz="4400" b="1" dirty="0">
+                <a:solidFill>
+                  <a:srgbClr val="5EC8C8"/>
+                </a:solidFill>
+                <a:latin typeface="Georgia" pitchFamily="34" charset="0"/>
+                <a:ea typeface="Georgia" pitchFamily="34" charset="-122"/>
+                <a:cs typeface="Georgia" pitchFamily="34" charset="-120"/>
+              </a:rPr>
+              <a:t>17 / 60</a:t>
+            </a:r>
+            <a:endParaRPr lang="en-US" sz="4400" dirty="0"/>
+          </a:p>
+          <a:p>
+            <a:pPr indent="0" marL="0">
+              <a:lnSpc>
+                <a:spcPct val="105000"/>
+              </a:lnSpc>
+              <a:buNone/>
+            </a:pPr>
+            <a:r>
+              <a:rPr lang="en-US" sz="1400" b="1" dirty="0">
                 <a:solidFill>
                   <a:srgbClr val="FFFFFF"/>
                 </a:solidFill>
-                <a:latin typeface="Calibri" pitchFamily="34" charset="0"/>
-                <a:ea typeface="Calibri" pitchFamily="34" charset="-122"/>
-                <a:cs typeface="Calibri" pitchFamily="34" charset="-120"/>
-              </a:rPr>
-              <a:t>2</a:t>
-            </a:r>
-            <a:endParaRPr lang="en-US" sz="1800" dirty="0"/>
-          </a:p>
-        </p:txBody>
-      </p:sp>
-      <p:sp>
-        <p:nvSpPr>
-          <p:cNvPr id="11" name="Text 9"/>
-          <p:cNvSpPr/>
-          <p:nvPr/>
-        </p:nvSpPr>
-        <p:spPr>
-          <a:xfrm>
-            <a:off x="4809744" y="2606040"/>
-            <a:ext cx="2926080" cy="457200"/>
-          </a:xfrm>
-          <a:prstGeom prst="rect">
-            <a:avLst/>
-          </a:prstGeom>
-          <a:noFill/>
-          <a:ln/>
-        </p:spPr>
-        <p:txBody>
-          <a:bodyPr wrap="square" rtlCol="0" anchor="ctr"/>
-          <a:lstStyle/>
-          <a:p>
-            <a:pPr indent="0" marL="0">
-              <a:buNone/>
-            </a:pPr>
-            <a:r>
-              <a:rPr lang="en-US" sz="1700" b="1" dirty="0">
-                <a:solidFill>
-                  <a:srgbClr val="5EC8C8"/>
-                </a:solidFill>
-                <a:latin typeface="Calibri" pitchFamily="34" charset="0"/>
-                <a:ea typeface="Calibri" pitchFamily="34" charset="-122"/>
-                <a:cs typeface="Calibri" pitchFamily="34" charset="-120"/>
-              </a:rPr>
-              <a:t>Retry chaining</a:t>
-            </a:r>
-            <a:endParaRPr lang="en-US" sz="1700" dirty="0"/>
-          </a:p>
-        </p:txBody>
-      </p:sp>
-      <p:sp>
-        <p:nvSpPr>
-          <p:cNvPr id="12" name="Text 10"/>
-          <p:cNvSpPr/>
-          <p:nvPr/>
-        </p:nvSpPr>
-        <p:spPr>
-          <a:xfrm>
-            <a:off x="4809744" y="3108960"/>
-            <a:ext cx="2926080" cy="914400"/>
-          </a:xfrm>
-          <a:prstGeom prst="rect">
-            <a:avLst/>
-          </a:prstGeom>
-          <a:noFill/>
-          <a:ln/>
-        </p:spPr>
-        <p:txBody>
-          <a:bodyPr wrap="square" rtlCol="0" anchor="ctr"/>
-          <a:lstStyle/>
+              </a:rPr>
+              <a:t>abstained, did not guess</a:t>
+            </a:r>
+            <a:endParaRPr lang="en-US" sz="4400" dirty="0"/>
+          </a:p>
           <a:p>
             <a:pPr indent="0" marL="0">
               <a:lnSpc>
-                <a:spcPct val="110000"/>
+                <a:spcPct val="105000"/>
               </a:lnSpc>
               <a:buNone/>
             </a:pPr>
             <a:r>
-              <a:rPr lang="en-US" sz="1350" dirty="0">
+              <a:rPr lang="en-US" sz="1250" dirty="0">
                 <a:solidFill>
                   <a:srgbClr val="CADCFC"/>
                 </a:solidFill>
-                <a:latin typeface="Calibri" pitchFamily="34" charset="0"/>
-                <a:ea typeface="Calibri" pitchFamily="34" charset="-122"/>
-                <a:cs typeface="Calibri" pitchFamily="34" charset="-120"/>
-              </a:rPr>
-              <a:t>Feed a failed attempt's context into the retry, or retry from scratch each time?</a:t>
-            </a:r>
-            <a:endParaRPr lang="en-US" sz="1350" dirty="0"/>
-          </a:p>
-        </p:txBody>
-      </p:sp>
-      <p:sp>
-        <p:nvSpPr>
-          <p:cNvPr id="13" name="Shape 11"/>
-          <p:cNvSpPr/>
-          <p:nvPr/>
-        </p:nvSpPr>
-        <p:spPr>
-          <a:xfrm>
-            <a:off x="8339328" y="1554480"/>
-            <a:ext cx="3566160" cy="2606040"/>
+              </a:rPr>
+              <a:t>an honest "inconclusive" over a forced answer</a:t>
+            </a:r>
+            <a:endParaRPr lang="en-US" sz="4400" dirty="0"/>
+          </a:p>
+        </p:txBody>
+      </p:sp>
+      <p:sp>
+        <p:nvSpPr>
+          <p:cNvPr id="8" name="Shape 6"/>
+          <p:cNvSpPr/>
+          <p:nvPr/>
+        </p:nvSpPr>
+        <p:spPr>
+          <a:xfrm>
+            <a:off x="8028432" y="1600200"/>
+            <a:ext cx="3520440" cy="2011680"/>
           </a:xfrm>
           <a:prstGeom prst="roundRect">
             <a:avLst>
-              <a:gd name="adj" fmla="val 2456"/>
+              <a:gd name="adj" fmla="val 2727"/>
             </a:avLst>
           </a:prstGeom>
           <a:solidFill>
@@ -5771,34 +5253,14 @@
       </p:sp>
       <p:sp>
         <p:nvSpPr>
-          <p:cNvPr id="14" name="Shape 12"/>
-          <p:cNvSpPr/>
-          <p:nvPr/>
-        </p:nvSpPr>
-        <p:spPr>
-          <a:xfrm>
-            <a:off x="8659368" y="1920240"/>
-            <a:ext cx="502920" cy="502920"/>
-          </a:xfrm>
-          <a:prstGeom prst="ellipse">
-            <a:avLst/>
-          </a:prstGeom>
-          <a:solidFill>
-            <a:srgbClr val="0E7C86"/>
-          </a:solidFill>
-          <a:ln/>
-        </p:spPr>
-      </p:sp>
-      <p:sp>
-        <p:nvSpPr>
-          <p:cNvPr id="15" name="Text 13"/>
-          <p:cNvSpPr/>
-          <p:nvPr/>
-        </p:nvSpPr>
-        <p:spPr>
-          <a:xfrm>
-            <a:off x="8659368" y="1920240"/>
-            <a:ext cx="502920" cy="502920"/>
+          <p:cNvPr id="9" name="Text 7"/>
+          <p:cNvSpPr/>
+          <p:nvPr/>
+        </p:nvSpPr>
+        <p:spPr>
+          <a:xfrm>
+            <a:off x="8257032" y="1965960"/>
+            <a:ext cx="3108960" cy="1463040"/>
           </a:xfrm>
           <a:prstGeom prst="rect">
             <a:avLst/>
@@ -5810,34 +5272,144 @@
           <a:bodyPr wrap="square" rtlCol="0" anchor="ctr"/>
           <a:lstStyle/>
           <a:p>
-            <a:pPr algn="ctr" indent="0" marL="0">
-              <a:buNone/>
-            </a:pPr>
-            <a:r>
-              <a:rPr lang="en-US" sz="1800" b="1" dirty="0">
+            <a:pPr indent="0" marL="0">
+              <a:lnSpc>
+                <a:spcPct val="105000"/>
+              </a:lnSpc>
+              <a:buNone/>
+            </a:pPr>
+            <a:r>
+              <a:rPr lang="en-US" sz="3000" b="1" dirty="0">
+                <a:solidFill>
+                  <a:srgbClr val="5EC8C8"/>
+                </a:solidFill>
+                <a:latin typeface="Georgia" pitchFamily="34" charset="0"/>
+                <a:ea typeface="Georgia" pitchFamily="34" charset="-122"/>
+                <a:cs typeface="Georgia" pitchFamily="34" charset="-120"/>
+              </a:rPr>
+              <a:t>recall,</a:t>
+            </a:r>
+            <a:pPr indent="0" marL="0">
+              <a:lnSpc>
+                <a:spcPct val="105000"/>
+              </a:lnSpc>
+              <a:buNone/>
+            </a:pPr>
+            <a:r>
+              <a:rPr lang="en-US" sz="2200" b="1" dirty="0">
                 <a:solidFill>
                   <a:srgbClr val="FFFFFF"/>
+                </a:solidFill>
+                <a:latin typeface="Georgia" pitchFamily="34" charset="0"/>
+                <a:ea typeface="Georgia" pitchFamily="34" charset="-122"/>
+                <a:cs typeface="Georgia" pitchFamily="34" charset="-120"/>
+              </a:rPr>
+              <a:t> not precision</a:t>
+            </a:r>
+            <a:endParaRPr lang="en-US" sz="3000" dirty="0"/>
+          </a:p>
+          <a:p>
+            <a:pPr indent="0" marL="0">
+              <a:lnSpc>
+                <a:spcPct val="105000"/>
+              </a:lnSpc>
+              <a:buNone/>
+            </a:pPr>
+            <a:r>
+              <a:rPr lang="en-US" sz="1250" dirty="0">
+                <a:solidFill>
+                  <a:srgbClr val="CADCFC"/>
+                </a:solidFill>
+              </a:rPr>
+              <a:t>failures are "could not find it", not "made it up"</a:t>
+            </a:r>
+            <a:endParaRPr lang="en-US" sz="3000" dirty="0"/>
+          </a:p>
+        </p:txBody>
+      </p:sp>
+      <p:sp>
+        <p:nvSpPr>
+          <p:cNvPr id="10" name="Shape 8"/>
+          <p:cNvSpPr/>
+          <p:nvPr/>
+        </p:nvSpPr>
+        <p:spPr>
+          <a:xfrm>
+            <a:off x="640080" y="3840480"/>
+            <a:ext cx="10908792" cy="1371600"/>
+          </a:xfrm>
+          <a:prstGeom prst="roundRect">
+            <a:avLst>
+              <a:gd name="adj" fmla="val 4000"/>
+            </a:avLst>
+          </a:prstGeom>
+          <a:solidFill>
+            <a:srgbClr val="12324A"/>
+          </a:solidFill>
+          <a:ln w="12700">
+            <a:solidFill>
+              <a:srgbClr val="0E7C86"/>
+            </a:solidFill>
+            <a:prstDash val="solid"/>
+          </a:ln>
+          <a:effectLst>
+            <a:outerShdw sx="100000" sy="100000" kx="0" ky="0" algn="bl" rotWithShape="0" blurRad="88900" dist="25400" dir="8100000">
+              <a:srgbClr val="0F2A43">
+                <a:alpha val="12000"/>
+              </a:srgbClr>
+            </a:outerShdw>
+          </a:effectLst>
+        </p:spPr>
+      </p:sp>
+      <p:sp>
+        <p:nvSpPr>
+          <p:cNvPr id="11" name="Text 9"/>
+          <p:cNvSpPr/>
+          <p:nvPr/>
+        </p:nvSpPr>
+        <p:spPr>
+          <a:xfrm>
+            <a:off x="914400" y="4023360"/>
+            <a:ext cx="8229600" cy="292608"/>
+          </a:xfrm>
+          <a:prstGeom prst="rect">
+            <a:avLst/>
+          </a:prstGeom>
+          <a:noFill/>
+          <a:ln/>
+        </p:spPr>
+        <p:txBody>
+          <a:bodyPr wrap="square" rtlCol="0" anchor="ctr"/>
+          <a:lstStyle/>
+          <a:p>
+            <a:pPr indent="0" marL="0">
+              <a:buNone/>
+            </a:pPr>
+            <a:r>
+              <a:rPr lang="en-US" sz="1250" b="1" spc="200" kern="0" dirty="0">
+                <a:solidFill>
+                  <a:srgbClr val="13A38A"/>
                 </a:solidFill>
                 <a:latin typeface="Calibri" pitchFamily="34" charset="0"/>
                 <a:ea typeface="Calibri" pitchFamily="34" charset="-122"/>
                 <a:cs typeface="Calibri" pitchFamily="34" charset="-120"/>
               </a:rPr>
-              <a:t>3</a:t>
-            </a:r>
-            <a:endParaRPr lang="en-US" sz="1800" dirty="0"/>
-          </a:p>
-        </p:txBody>
-      </p:sp>
-      <p:sp>
-        <p:nvSpPr>
-          <p:cNvPr id="16" name="Text 14"/>
-          <p:cNvSpPr/>
-          <p:nvPr/>
-        </p:nvSpPr>
-        <p:spPr>
-          <a:xfrm>
-            <a:off x="8659368" y="2606040"/>
-            <a:ext cx="2926080" cy="457200"/>
+              <a:t>THE UPSIDE</a:t>
+            </a:r>
+            <a:endParaRPr lang="en-US" sz="1250" dirty="0"/>
+          </a:p>
+        </p:txBody>
+      </p:sp>
+      <p:sp>
+        <p:nvSpPr>
+          <p:cNvPr id="12" name="Text 10"/>
+          <p:cNvSpPr/>
+          <p:nvPr/>
+        </p:nvSpPr>
+        <p:spPr>
+          <a:xfrm>
+            <a:off x="914400" y="4370832"/>
+            <a:ext cx="10332720" cy="731520"/>
           </a:xfrm>
           <a:prstGeom prst="rect">
             <a:avLst/>
@@ -5850,44 +5422,22 @@
           <a:lstStyle/>
           <a:p>
             <a:pPr indent="0" marL="0">
-              <a:buNone/>
-            </a:pPr>
-            <a:r>
-              <a:rPr lang="en-US" sz="1700" b="1" dirty="0">
-                <a:solidFill>
-                  <a:srgbClr val="5EC8C8"/>
+              <a:lnSpc>
+                <a:spcPct val="110000"/>
+              </a:lnSpc>
+              <a:buNone/>
+            </a:pPr>
+            <a:r>
+              <a:rPr lang="en-US" sz="1500" dirty="0">
+                <a:solidFill>
+                  <a:srgbClr val="CADCFC"/>
                 </a:solidFill>
                 <a:latin typeface="Calibri" pitchFamily="34" charset="0"/>
                 <a:ea typeface="Calibri" pitchFamily="34" charset="-122"/>
                 <a:cs typeface="Calibri" pitchFamily="34" charset="-120"/>
               </a:rPr>
-              <a:t>Cost vs quality</a:t>
-            </a:r>
-            <a:endParaRPr lang="en-US" sz="1700" dirty="0"/>
-          </a:p>
-        </p:txBody>
-      </p:sp>
-      <p:sp>
-        <p:nvSpPr>
-          <p:cNvPr id="17" name="Text 15"/>
-          <p:cNvSpPr/>
-          <p:nvPr/>
-        </p:nvSpPr>
-        <p:spPr>
-          <a:xfrm>
-            <a:off x="8659368" y="3108960"/>
-            <a:ext cx="2926080" cy="914400"/>
-          </a:xfrm>
-          <a:prstGeom prst="rect">
-            <a:avLst/>
-          </a:prstGeom>
-          <a:noFill/>
-          <a:ln/>
-        </p:spPr>
-        <p:txBody>
-          <a:bodyPr wrap="square" rtlCol="0" anchor="ctr"/>
-          <a:lstStyle/>
-          <a:p>
+              <a:t>Where it finds independent evidence it can beat the self-report. France claimed </a:t>
+            </a:r>
             <a:pPr indent="0" marL="0">
               <a:lnSpc>
                 <a:spcPct val="110000"/>
@@ -5895,113 +5445,55 @@
               <a:buNone/>
             </a:pPr>
             <a:r>
-              <a:rPr lang="en-US" sz="1350" dirty="0">
-                <a:solidFill>
-                  <a:srgbClr val="CADCFC"/>
+              <a:rPr lang="en-US" sz="1500" b="1" dirty="0">
+                <a:solidFill>
+                  <a:srgbClr val="FFFFFF"/>
                 </a:solidFill>
                 <a:latin typeface="Calibri" pitchFamily="34" charset="0"/>
                 <a:ea typeface="Calibri" pitchFamily="34" charset="-122"/>
                 <a:cs typeface="Calibri" pitchFamily="34" charset="-120"/>
               </a:rPr>
-              <a:t>Search-depth knobs: what does one more unit of accuracy actually cost?</a:t>
-            </a:r>
-            <a:endParaRPr lang="en-US" sz="1350" dirty="0"/>
-          </a:p>
-        </p:txBody>
-      </p:sp>
-      <p:sp>
-        <p:nvSpPr>
-          <p:cNvPr id="18" name="Text 16"/>
-          <p:cNvSpPr/>
-          <p:nvPr/>
-        </p:nvSpPr>
-        <p:spPr>
-          <a:xfrm>
-            <a:off x="640080" y="4572000"/>
-            <a:ext cx="2743200" cy="320040"/>
-          </a:xfrm>
-          <a:prstGeom prst="rect">
-            <a:avLst/>
-          </a:prstGeom>
-          <a:noFill/>
-          <a:ln/>
-        </p:spPr>
-        <p:txBody>
-          <a:bodyPr wrap="square" rtlCol="0" anchor="ctr"/>
-          <a:lstStyle/>
-          <a:p>
-            <a:pPr indent="0" marL="0">
-              <a:buNone/>
-            </a:pPr>
-            <a:r>
-              <a:rPr lang="en-US" sz="1300" b="1" spc="200" kern="0" dirty="0">
-                <a:solidFill>
-                  <a:srgbClr val="5EC8C8"/>
+              <a:t>&gt;90%</a:t>
+            </a:r>
+            <a:pPr indent="0" marL="0">
+              <a:lnSpc>
+                <a:spcPct val="110000"/>
+              </a:lnSpc>
+              <a:buNone/>
+            </a:pPr>
+            <a:r>
+              <a:rPr lang="en-US" sz="1500" dirty="0">
+                <a:solidFill>
+                  <a:srgbClr val="CADCFC"/>
                 </a:solidFill>
                 <a:latin typeface="Calibri" pitchFamily="34" charset="0"/>
                 <a:ea typeface="Calibri" pitchFamily="34" charset="-122"/>
                 <a:cs typeface="Calibri" pitchFamily="34" charset="-120"/>
               </a:rPr>
-              <a:t>NEXT</a:t>
-            </a:r>
-            <a:endParaRPr lang="en-US" sz="1300" dirty="0"/>
-          </a:p>
-        </p:txBody>
-      </p:sp>
-      <p:sp>
-        <p:nvSpPr>
-          <p:cNvPr id="19" name="Text 17"/>
-          <p:cNvSpPr/>
-          <p:nvPr/>
-        </p:nvSpPr>
-        <p:spPr>
-          <a:xfrm>
-            <a:off x="640080" y="4937760"/>
-            <a:ext cx="10789920" cy="1005840"/>
-          </a:xfrm>
-          <a:prstGeom prst="rect">
-            <a:avLst/>
-          </a:prstGeom>
-          <a:noFill/>
-          <a:ln/>
-        </p:spPr>
-        <p:txBody>
-          <a:bodyPr wrap="square" rtlCol="0" anchor="ctr"/>
-          <a:lstStyle/>
-          <a:p>
-            <a:pPr marL="342900" indent="-342900">
+              <a:t> on licence coverage and metadata conformance; the recompute reads </a:t>
+            </a:r>
+            <a:pPr indent="0" marL="0">
               <a:lnSpc>
-                <a:spcPct val="115000"/>
+                <a:spcPct val="110000"/>
               </a:lnSpc>
-              <a:spcAft>
-                <a:spcPts val="600"/>
-              </a:spcAft>
-              <a:buSzPct val="100000"/>
-              <a:buChar char="•"/>
-            </a:pPr>
-            <a:r>
-              <a:rPr lang="en-US" sz="1500" dirty="0">
-                <a:solidFill>
-                  <a:srgbClr val="CADCFC"/>
+              <a:buNone/>
+            </a:pPr>
+            <a:r>
+              <a:rPr lang="en-US" sz="1500" b="1" dirty="0">
+                <a:solidFill>
+                  <a:srgbClr val="FCA5A5"/>
                 </a:solidFill>
                 <a:latin typeface="Calibri" pitchFamily="34" charset="0"/>
                 <a:ea typeface="Calibri" pitchFamily="34" charset="-122"/>
                 <a:cs typeface="Calibri" pitchFamily="34" charset="-120"/>
               </a:rPr>
-              <a:t>Scale to more countries (Malta dispatch queued).</a:t>
-            </a:r>
-            <a:endParaRPr lang="en-US" sz="1500" dirty="0"/>
-          </a:p>
-          <a:p>
-            <a:pPr marL="342900" indent="-342900">
+              <a:t>~38%</a:t>
+            </a:r>
+            <a:pPr indent="0" marL="0">
               <a:lnSpc>
-                <a:spcPct val="115000"/>
+                <a:spcPct val="110000"/>
               </a:lnSpc>
-              <a:spcAft>
-                <a:spcPts val="600"/>
-              </a:spcAft>
-              <a:buSzPct val="100000"/>
-              <a:buChar char="•"/>
+              <a:buNone/>
             </a:pPr>
             <a:r>
               <a:rPr lang="en-US" sz="1500" dirty="0">
@@ -6012,7 +5504,41 @@
                 <a:ea typeface="Calibri" pitchFamily="34" charset="-122"/>
                 <a:cs typeface="Calibri" pitchFamily="34" charset="-120"/>
               </a:rPr>
-              <a:t>Lock the held-out evaluation set, then report accuracy on unseen countries.</a:t>
+              <a:t> and </a:t>
+            </a:r>
+            <a:pPr indent="0" marL="0">
+              <a:lnSpc>
+                <a:spcPct val="110000"/>
+              </a:lnSpc>
+              <a:buNone/>
+            </a:pPr>
+            <a:r>
+              <a:rPr lang="en-US" sz="1500" b="1" dirty="0">
+                <a:solidFill>
+                  <a:srgbClr val="FCA5A5"/>
+                </a:solidFill>
+                <a:latin typeface="Calibri" pitchFamily="34" charset="0"/>
+                <a:ea typeface="Calibri" pitchFamily="34" charset="-122"/>
+                <a:cs typeface="Calibri" pitchFamily="34" charset="-120"/>
+              </a:rPr>
+              <a:t>~32%</a:t>
+            </a:r>
+            <a:pPr indent="0" marL="0">
+              <a:lnSpc>
+                <a:spcPct val="110000"/>
+              </a:lnSpc>
+              <a:buNone/>
+            </a:pPr>
+            <a:r>
+              <a:rPr lang="en-US" sz="1500" dirty="0">
+                <a:solidFill>
+                  <a:srgbClr val="CADCFC"/>
+                </a:solidFill>
+                <a:latin typeface="Calibri" pitchFamily="34" charset="0"/>
+                <a:ea typeface="Calibri" pitchFamily="34" charset="-122"/>
+                <a:cs typeface="Calibri" pitchFamily="34" charset="-120"/>
+              </a:rPr>
+              <a:t>.</a:t>
             </a:r>
             <a:endParaRPr lang="en-US" sz="1500" dirty="0"/>
           </a:p>
@@ -6020,13 +5546,72 @@
       </p:sp>
       <p:sp>
         <p:nvSpPr>
-          <p:cNvPr id="20" name="Text 18"/>
-          <p:cNvSpPr/>
-          <p:nvPr/>
-        </p:nvSpPr>
-        <p:spPr>
-          <a:xfrm>
-            <a:off x="640080" y="6172200"/>
+          <p:cNvPr id="13" name="Text 11"/>
+          <p:cNvSpPr/>
+          <p:nvPr/>
+        </p:nvSpPr>
+        <p:spPr>
+          <a:xfrm>
+            <a:off x="640080" y="5440680"/>
+            <a:ext cx="10881360" cy="548640"/>
+          </a:xfrm>
+          <a:prstGeom prst="rect">
+            <a:avLst/>
+          </a:prstGeom>
+          <a:noFill/>
+          <a:ln/>
+        </p:spPr>
+        <p:txBody>
+          <a:bodyPr wrap="square" rtlCol="0" anchor="ctr"/>
+          <a:lstStyle/>
+          <a:p>
+            <a:pPr indent="0" marL="0">
+              <a:lnSpc>
+                <a:spcPct val="110000"/>
+              </a:lnSpc>
+              <a:buNone/>
+            </a:pPr>
+            <a:r>
+              <a:rPr lang="en-US" sz="1450" b="1" dirty="0">
+                <a:solidFill>
+                  <a:srgbClr val="5EC8C8"/>
+                </a:solidFill>
+                <a:latin typeface="Calibri" pitchFamily="34" charset="0"/>
+                <a:ea typeface="Calibri" pitchFamily="34" charset="-122"/>
+                <a:cs typeface="Calibri" pitchFamily="34" charset="-120"/>
+              </a:rPr>
+              <a:t>Next:  </a:t>
+            </a:r>
+            <a:pPr indent="0" marL="0">
+              <a:lnSpc>
+                <a:spcPct val="110000"/>
+              </a:lnSpc>
+              <a:buNone/>
+            </a:pPr>
+            <a:r>
+              <a:rPr lang="en-US" sz="1450" dirty="0">
+                <a:solidFill>
+                  <a:srgbClr val="CADCFC"/>
+                </a:solidFill>
+                <a:latin typeface="Calibri" pitchFamily="34" charset="0"/>
+                <a:ea typeface="Calibri" pitchFamily="34" charset="-122"/>
+                <a:cs typeface="Calibri" pitchFamily="34" charset="-120"/>
+              </a:rPr>
+              <a:t>lock the balanced held-out set, finish the Verifier and chaining experiments, then scale across countries.</a:t>
+            </a:r>
+            <a:endParaRPr lang="en-US" sz="1450" dirty="0"/>
+          </a:p>
+        </p:txBody>
+      </p:sp>
+      <p:sp>
+        <p:nvSpPr>
+          <p:cNvPr id="14" name="Text 12"/>
+          <p:cNvSpPr/>
+          <p:nvPr/>
+        </p:nvSpPr>
+        <p:spPr>
+          <a:xfrm>
+            <a:off x="640080" y="6080760"/>
             <a:ext cx="10972800" cy="457200"/>
           </a:xfrm>
           <a:prstGeom prst="rect">
@@ -6043,7 +5628,7 @@
               <a:buNone/>
             </a:pPr>
             <a:r>
-              <a:rPr lang="en-US" sz="1600" i="1" dirty="0">
+              <a:rPr lang="en-US" sz="1700" i="1" dirty="0">
                 <a:solidFill>
                   <a:srgbClr val="13A38A"/>
                 </a:solidFill>
@@ -6051,9 +5636,9 @@
                 <a:ea typeface="Georgia" pitchFamily="34" charset="-122"/>
                 <a:cs typeface="Georgia" pitchFamily="34" charset="-120"/>
               </a:rPr>
-              <a:t>Receipts for every answer; honest about every disagreement.</a:t>
-            </a:r>
-            <a:endParaRPr lang="en-US" sz="1600" dirty="0"/>
+              <a:t>It would rather say "I do not know" than make something up.</a:t>
+            </a:r>
+            <a:endParaRPr lang="en-US" sz="1700" dirty="0"/>
           </a:p>
         </p:txBody>
       </p:sp>
